--- a/事業計画書_営業戦略プラン_v2.pptx
+++ b/事業計画書_営業戦略プラン_v2.pptx
@@ -14882,7 +14882,7 @@
                 <a:ea typeface="Calibri" pitchFamily="34" charset="-122"/>
                 <a:cs typeface="Calibri" pitchFamily="34" charset="-120"/>
               </a:rPr>
-              <a:t>仕入れコスト = ほぼゼロ</a:t>
+              <a:t>仕入れコスト＝ほぼゼロ（リユース品）</a:t>
             </a:r>
             <a:endParaRPr lang="en-US" sz="1200" dirty="0"/>
           </a:p>
@@ -14924,7 +14924,7 @@
                 <a:ea typeface="Calibri" pitchFamily="34" charset="-122"/>
                 <a:cs typeface="Calibri" pitchFamily="34" charset="-120"/>
               </a:rPr>
-              <a:t>廃棄物回収網から家電を調達。競合が真似できない原価構造で業界最安水準を実現</a:t>
+              <a:t>廃棄物回収網からリユース家電を調達（コストほぼゼロ）。ただし初期は台数にばらつきがあり、新品（調達コスト発生）で補う可能性がある。</a:t>
             </a:r>
             <a:endParaRPr lang="en-US" sz="1050" dirty="0"/>
           </a:p>

--- a/事業計画書_営業戦略プラン_v2.pptx
+++ b/事業計画書_営業戦略プラン_v2.pptx
@@ -19189,7 +19189,7 @@
                 <a:ea typeface="Calibri" pitchFamily="34" charset="-122"/>
                 <a:cs typeface="Calibri" pitchFamily="34" charset="-120"/>
               </a:rPr>
-              <a:t>即効</a:t>
+              <a:t>最重点</a:t>
             </a:r>
             <a:endParaRPr lang="en-US" sz="900" dirty="0"/>
           </a:p>
@@ -19228,7 +19228,7 @@
                 <a:ea typeface="Calibri" pitchFamily="34" charset="-122"/>
                 <a:cs typeface="Calibri" pitchFamily="34" charset="-120"/>
               </a:rPr>
-              <a:t>既存顧客経由（廃棄物回収先250社）</a:t>
+              <a:t>小規模生協への直接訪問と資料郵送</a:t>
             </a:r>
             <a:endParaRPr lang="en-US" sz="1400" dirty="0"/>
           </a:p>
@@ -19270,7 +19270,7 @@
                 <a:ea typeface="Calibri" pitchFamily="34" charset="-122"/>
                 <a:cs typeface="Calibri" pitchFamily="34" charset="-120"/>
               </a:rPr>
-              <a:t>既存250社の信頼関係を直接活用。受注コストほぼゼロ</a:t>
+              <a:t>競合未提携の小規模校が多く、留学生ニーズが高い。まず訪問または紙資料で接触</a:t>
             </a:r>
             <a:endParaRPr lang="en-US" sz="1050" dirty="0"/>
           </a:p>
@@ -19329,7 +19329,7 @@
                 <a:ea typeface="Calibri" pitchFamily="34" charset="-122"/>
                 <a:cs typeface="Calibri" pitchFamily="34" charset="-120"/>
               </a:rPr>
-              <a:t>既存法人担当者へDM・TELで紹介依頼</a:t>
+              <a:t>留学生比率大・小規模生協をリストアップ</a:t>
             </a:r>
             <a:endParaRPr lang="en-US" sz="1000" dirty="0"/>
           </a:p>
@@ -19388,7 +19388,7 @@
                 <a:ea typeface="Calibri" pitchFamily="34" charset="-122"/>
                 <a:cs typeface="Calibri" pitchFamily="34" charset="-120"/>
               </a:rPr>
-              <a:t>担当者のお子様・知人の新入生にアプローチ</a:t>
+              <a:t>直接訪問または紙ベース資料を郵送して提案</a:t>
             </a:r>
             <a:endParaRPr lang="en-US" sz="1000" dirty="0"/>
           </a:p>
@@ -19447,7 +19447,7 @@
                 <a:ea typeface="Calibri" pitchFamily="34" charset="-122"/>
                 <a:cs typeface="Calibri" pitchFamily="34" charset="-120"/>
               </a:rPr>
-              <a:t>成約時に紹介者へ謝礼（商品券・割引等）</a:t>
+              <a:t>在日留学生コミュニティへの口コミも活用</a:t>
             </a:r>
             <a:endParaRPr lang="en-US" sz="1000" dirty="0"/>
           </a:p>
@@ -19506,7 +19506,7 @@
                 <a:ea typeface="Calibri" pitchFamily="34" charset="-122"/>
                 <a:cs typeface="Calibri" pitchFamily="34" charset="-120"/>
               </a:rPr>
-              <a:t>今すぐ開始（全顧客リストへ展開）</a:t>
+              <a:t>10〜12月仕込み、3〜4月獲得</a:t>
             </a:r>
             <a:endParaRPr lang="en-US" sz="1000" dirty="0"/>
           </a:p>
@@ -19527,7 +19527,7 @@
             <a:avLst/>
           </a:prstGeom>
           <a:solidFill>
-            <a:srgbClr val="F3F3F3"/>
+            <a:srgbClr val="FFF3E0"/>
           </a:solidFill>
           <a:ln w="9525">
             <a:solidFill>
@@ -19552,7 +19552,7 @@
             <a:avLst/>
           </a:prstGeom>
           <a:solidFill>
-            <a:srgbClr val="DD7E6B"/>
+            <a:srgbClr val="E65100"/>
           </a:solidFill>
           <a:ln/>
         </p:spPr>
@@ -19572,7 +19572,7 @@
             <a:avLst/>
           </a:prstGeom>
           <a:solidFill>
-            <a:srgbClr val="DD7E6B"/>
+            <a:srgbClr val="E65100"/>
           </a:solidFill>
           <a:ln/>
         </p:spPr>
@@ -19631,7 +19631,7 @@
             <a:avLst/>
           </a:prstGeom>
           <a:solidFill>
-            <a:srgbClr val="DD7E6B"/>
+            <a:srgbClr val="E65100"/>
           </a:solidFill>
           <a:ln/>
         </p:spPr>
@@ -19669,7 +19669,7 @@
                 <a:ea typeface="Calibri" pitchFamily="34" charset="-122"/>
                 <a:cs typeface="Calibri" pitchFamily="34" charset="-120"/>
               </a:rPr>
-              <a:t>重点</a:t>
+              <a:t>補完</a:t>
             </a:r>
             <a:endParaRPr lang="en-US" sz="900" dirty="0"/>
           </a:p>
@@ -19708,7 +19708,7 @@
                 <a:ea typeface="Calibri" pitchFamily="34" charset="-122"/>
                 <a:cs typeface="Calibri" pitchFamily="34" charset="-120"/>
               </a:rPr>
-              <a:t>留学生比率高・中小規模大学生協</a:t>
+              <a:t>チラシ設置 + KB 2,000円/件</a:t>
             </a:r>
             <a:endParaRPr lang="en-US" sz="1400" dirty="0"/>
           </a:p>
@@ -19750,7 +19750,7 @@
                 <a:ea typeface="Calibri" pitchFamily="34" charset="-122"/>
                 <a:cs typeface="Calibri" pitchFamily="34" charset="-120"/>
               </a:rPr>
-              <a:t>城西大学等競合未提携の中小校。留学生はニーズが高い</a:t>
+              <a:t>入居タイミングで接触。KB設計で紹介元の動機を確保</a:t>
             </a:r>
             <a:endParaRPr lang="en-US" sz="1050" dirty="0"/>
           </a:p>
@@ -19771,7 +19771,7 @@
             <a:avLst/>
           </a:prstGeom>
           <a:solidFill>
-            <a:srgbClr val="DD7E6B"/>
+            <a:srgbClr val="E65100"/>
           </a:solidFill>
           <a:ln/>
         </p:spPr>
@@ -19809,7 +19809,7 @@
                 <a:ea typeface="Calibri" pitchFamily="34" charset="-122"/>
                 <a:cs typeface="Calibri" pitchFamily="34" charset="-120"/>
               </a:rPr>
-              <a:t>競合未提携の中小大学をリストアップ</a:t>
+              <a:t>仲介・入寮施設にチラシ設置（KB 2,000円/件）</a:t>
             </a:r>
             <a:endParaRPr lang="en-US" sz="1000" dirty="0"/>
           </a:p>
@@ -19830,7 +19830,7 @@
             <a:avLst/>
           </a:prstGeom>
           <a:solidFill>
-            <a:srgbClr val="DD7E6B"/>
+            <a:srgbClr val="E65100"/>
           </a:solidFill>
           <a:ln/>
         </p:spPr>
@@ -19868,7 +19868,7 @@
                 <a:ea typeface="Calibri" pitchFamily="34" charset="-122"/>
                 <a:cs typeface="Calibri" pitchFamily="34" charset="-120"/>
               </a:rPr>
-              <a:t>生協・学生センターへ提案（KB 2千円/件）</a:t>
+              <a:t>外国人支援窓口・留学生ハウスにも配布</a:t>
             </a:r>
             <a:endParaRPr lang="en-US" sz="1000" dirty="0"/>
           </a:p>
@@ -19889,7 +19889,7 @@
             <a:avLst/>
           </a:prstGeom>
           <a:solidFill>
-            <a:srgbClr val="DD7E6B"/>
+            <a:srgbClr val="E65100"/>
           </a:solidFill>
           <a:ln/>
         </p:spPr>
@@ -19927,7 +19927,7 @@
                 <a:ea typeface="Calibri" pitchFamily="34" charset="-122"/>
                 <a:cs typeface="Calibri" pitchFamily="34" charset="-120"/>
               </a:rPr>
-              <a:t>在日留学生コミュニティへの口コミも活用</a:t>
+              <a:t>管理会社にQRコード付きカードを設置</a:t>
             </a:r>
             <a:endParaRPr lang="en-US" sz="1000" dirty="0"/>
           </a:p>
@@ -19948,7 +19948,7 @@
             <a:avLst/>
           </a:prstGeom>
           <a:solidFill>
-            <a:srgbClr val="DD7E6B"/>
+            <a:srgbClr val="E65100"/>
           </a:solidFill>
           <a:ln/>
         </p:spPr>
@@ -19986,7 +19986,7 @@
                 <a:ea typeface="Calibri" pitchFamily="34" charset="-122"/>
                 <a:cs typeface="Calibri" pitchFamily="34" charset="-120"/>
               </a:rPr>
-              <a:t>10〜12月仕込み、3〜4月獲得</a:t>
+              <a:t>通年（1〜3月を重点化）</a:t>
             </a:r>
             <a:endParaRPr lang="en-US" sz="1000" dirty="0"/>
           </a:p>
@@ -20007,7 +20007,7 @@
             <a:avLst/>
           </a:prstGeom>
           <a:solidFill>
-            <a:srgbClr val="FFF3E0"/>
+            <a:srgbClr val="F3F3F3"/>
           </a:solidFill>
           <a:ln w="9525">
             <a:solidFill>
@@ -20032,7 +20032,7 @@
             <a:avLst/>
           </a:prstGeom>
           <a:solidFill>
-            <a:srgbClr val="E65100"/>
+            <a:srgbClr val="595959"/>
           </a:solidFill>
           <a:ln/>
         </p:spPr>
@@ -20052,7 +20052,7 @@
             <a:avLst/>
           </a:prstGeom>
           <a:solidFill>
-            <a:srgbClr val="E65100"/>
+            <a:srgbClr val="595959"/>
           </a:solidFill>
           <a:ln/>
         </p:spPr>
@@ -20111,7 +20111,7 @@
             <a:avLst/>
           </a:prstGeom>
           <a:solidFill>
-            <a:srgbClr val="E65100"/>
+            <a:srgbClr val="595959"/>
           </a:solidFill>
           <a:ln/>
         </p:spPr>
@@ -20149,7 +20149,7 @@
                 <a:ea typeface="Calibri" pitchFamily="34" charset="-122"/>
                 <a:cs typeface="Calibri" pitchFamily="34" charset="-120"/>
               </a:rPr>
-              <a:t>補完</a:t>
+              <a:t>低優先</a:t>
             </a:r>
             <a:endParaRPr lang="en-US" sz="900" dirty="0"/>
           </a:p>
@@ -20188,7 +20188,7 @@
                 <a:ea typeface="Calibri" pitchFamily="34" charset="-122"/>
                 <a:cs typeface="Calibri" pitchFamily="34" charset="-120"/>
               </a:rPr>
-              <a:t>チラシ設置 + キックバック</a:t>
+              <a:t>既存顧客経由（廃棄物回収先250社）</a:t>
             </a:r>
             <a:endParaRPr lang="en-US" sz="1400" dirty="0"/>
           </a:p>
@@ -20230,7 +20230,7 @@
                 <a:ea typeface="Calibri" pitchFamily="34" charset="-122"/>
                 <a:cs typeface="Calibri" pitchFamily="34" charset="-120"/>
               </a:rPr>
-              <a:t>入居タイミングで接触。KB設計で紹介元の動機を確保</a:t>
+              <a:t>既存250社との信頼関係を活用。受注コストほぼゼロだが優先度は3番</a:t>
             </a:r>
             <a:endParaRPr lang="en-US" sz="1050" dirty="0"/>
           </a:p>
@@ -20251,7 +20251,7 @@
             <a:avLst/>
           </a:prstGeom>
           <a:solidFill>
-            <a:srgbClr val="E65100"/>
+            <a:srgbClr val="595959"/>
           </a:solidFill>
           <a:ln/>
         </p:spPr>
@@ -20289,7 +20289,7 @@
                 <a:ea typeface="Calibri" pitchFamily="34" charset="-122"/>
                 <a:cs typeface="Calibri" pitchFamily="34" charset="-120"/>
               </a:rPr>
-              <a:t>仲介・入寮施設にチラシ設置（KB 2千円/件）</a:t>
+              <a:t>既存法人担当者へDM・TELで紹介依頼</a:t>
             </a:r>
             <a:endParaRPr lang="en-US" sz="1000" dirty="0"/>
           </a:p>
@@ -20310,7 +20310,7 @@
             <a:avLst/>
           </a:prstGeom>
           <a:solidFill>
-            <a:srgbClr val="E65100"/>
+            <a:srgbClr val="595959"/>
           </a:solidFill>
           <a:ln/>
         </p:spPr>
@@ -20348,7 +20348,7 @@
                 <a:ea typeface="Calibri" pitchFamily="34" charset="-122"/>
                 <a:cs typeface="Calibri" pitchFamily="34" charset="-120"/>
               </a:rPr>
-              <a:t>外国人支援窓口・留学生ハウスにも配布</a:t>
+              <a:t>担当者のお子様・知人の新入生にアプローチ</a:t>
             </a:r>
             <a:endParaRPr lang="en-US" sz="1000" dirty="0"/>
           </a:p>
@@ -20369,7 +20369,7 @@
             <a:avLst/>
           </a:prstGeom>
           <a:solidFill>
-            <a:srgbClr val="E65100"/>
+            <a:srgbClr val="595959"/>
           </a:solidFill>
           <a:ln/>
         </p:spPr>
@@ -20407,7 +20407,7 @@
                 <a:ea typeface="Calibri" pitchFamily="34" charset="-122"/>
                 <a:cs typeface="Calibri" pitchFamily="34" charset="-120"/>
               </a:rPr>
-              <a:t>管理会社にQRコード付きカードを設置</a:t>
+              <a:t>成約時に紹介者へ謝礼（商品券・割引等）</a:t>
             </a:r>
             <a:endParaRPr lang="en-US" sz="1000" dirty="0"/>
           </a:p>
@@ -20428,7 +20428,7 @@
             <a:avLst/>
           </a:prstGeom>
           <a:solidFill>
-            <a:srgbClr val="E65100"/>
+            <a:srgbClr val="595959"/>
           </a:solidFill>
           <a:ln/>
         </p:spPr>
@@ -20466,7 +20466,7 @@
                 <a:ea typeface="Calibri" pitchFamily="34" charset="-122"/>
                 <a:cs typeface="Calibri" pitchFamily="34" charset="-120"/>
               </a:rPr>
-              <a:t>通年（1〜3月を重点化）</a:t>
+              <a:t>随時（優先度3番）</a:t>
             </a:r>
             <a:endParaRPr lang="en-US" sz="1000" dirty="0"/>
           </a:p>

--- a/事業計画書_営業戦略プラン_v2.pptx
+++ b/事業計画書_営業戦略プラン_v2.pptx
@@ -14581,8 +14581,8 @@
         </p:nvSpPr>
         <p:spPr>
           <a:xfrm>
-            <a:off x="365760" y="768096"/>
-            <a:ext cx="4160520" cy="2084832"/>
+            <a:off x="365760" y="731520"/>
+            <a:ext cx="4160520" cy="1481328"/>
           </a:xfrm>
           <a:prstGeom prst="rect">
             <a:avLst/>
@@ -14606,8 +14606,8 @@
         </p:nvSpPr>
         <p:spPr>
           <a:xfrm>
-            <a:off x="365760" y="768096"/>
-            <a:ext cx="4160520" cy="292608"/>
+            <a:off x="365760" y="731520"/>
+            <a:ext cx="4160520" cy="256032"/>
           </a:xfrm>
           <a:prstGeom prst="rect">
             <a:avLst/>
@@ -14626,8 +14626,8 @@
         </p:nvSpPr>
         <p:spPr>
           <a:xfrm>
-            <a:off x="365760" y="768096"/>
-            <a:ext cx="4160520" cy="292608"/>
+            <a:off x="365760" y="731520"/>
+            <a:ext cx="4160520" cy="256032"/>
           </a:xfrm>
           <a:prstGeom prst="rect">
             <a:avLst/>
@@ -14646,8 +14646,8 @@
         </p:nvSpPr>
         <p:spPr>
           <a:xfrm>
-            <a:off x="365760" y="768096"/>
-            <a:ext cx="4160520" cy="292608"/>
+            <a:off x="365760" y="731520"/>
+            <a:ext cx="4160520" cy="256032"/>
           </a:xfrm>
           <a:prstGeom prst="rect">
             <a:avLst/>
@@ -14685,8 +14685,8 @@
         </p:nvSpPr>
         <p:spPr>
           <a:xfrm>
-            <a:off x="502920" y="1152144"/>
-            <a:ext cx="256032" cy="256032"/>
+            <a:off x="502920" y="1060704"/>
+            <a:ext cx="237744" cy="237744"/>
           </a:xfrm>
           <a:prstGeom prst="rect">
             <a:avLst/>
@@ -14705,8 +14705,8 @@
         </p:nvSpPr>
         <p:spPr>
           <a:xfrm>
-            <a:off x="502920" y="1152144"/>
-            <a:ext cx="256032" cy="256032"/>
+            <a:off x="502920" y="1060704"/>
+            <a:ext cx="237744" cy="237744"/>
           </a:xfrm>
           <a:prstGeom prst="rect">
             <a:avLst/>
@@ -14722,7 +14722,7 @@
               <a:buNone/>
             </a:pPr>
             <a:r>
-              <a:rPr lang="en-US" sz="1100" b="1" dirty="0">
+              <a:rPr lang="en-US" sz="1000" b="1" dirty="0">
                 <a:solidFill>
                   <a:srgbClr val="FFFFFF"/>
                 </a:solidFill>
@@ -14732,7 +14732,7 @@
               </a:rPr>
               <a:t>✓</a:t>
             </a:r>
-            <a:endParaRPr lang="en-US" sz="1100" dirty="0"/>
+            <a:endParaRPr lang="en-US" sz="1000" dirty="0"/>
           </a:p>
         </p:txBody>
       </p:sp>
@@ -14744,8 +14744,8 @@
         </p:nvSpPr>
         <p:spPr>
           <a:xfrm>
-            <a:off x="841248" y="1133856"/>
-            <a:ext cx="3584448" cy="365760"/>
+            <a:off x="822960" y="1042416"/>
+            <a:ext cx="3602736" cy="329184"/>
           </a:xfrm>
           <a:prstGeom prst="rect">
             <a:avLst/>
@@ -14759,12 +14759,12 @@
           <a:p>
             <a:pPr indent="0" marL="0">
               <a:lnSpc>
-                <a:spcPct val="130000"/>
+                <a:spcPct val="120000"/>
               </a:lnSpc>
               <a:buNone/>
             </a:pPr>
             <a:r>
-              <a:rPr lang="en-US" sz="1100" dirty="0">
+              <a:rPr lang="en-US" sz="1050" dirty="0">
                 <a:solidFill>
                   <a:srgbClr val="333333"/>
                 </a:solidFill>
@@ -14774,7 +14774,7 @@
               </a:rPr>
               <a:t>ターゲット生協リスト作成（50〜80校：大学名・担当部署・TEL）</a:t>
             </a:r>
-            <a:endParaRPr lang="en-US" sz="1100" dirty="0"/>
+            <a:endParaRPr lang="en-US" sz="1050" dirty="0"/>
           </a:p>
         </p:txBody>
       </p:sp>
@@ -14786,8 +14786,8 @@
         </p:nvSpPr>
         <p:spPr>
           <a:xfrm>
-            <a:off x="502920" y="1700784"/>
-            <a:ext cx="256032" cy="256032"/>
+            <a:off x="502920" y="1444752"/>
+            <a:ext cx="237744" cy="237744"/>
           </a:xfrm>
           <a:prstGeom prst="rect">
             <a:avLst/>
@@ -14806,8 +14806,8 @@
         </p:nvSpPr>
         <p:spPr>
           <a:xfrm>
-            <a:off x="502920" y="1700784"/>
-            <a:ext cx="256032" cy="256032"/>
+            <a:off x="502920" y="1444752"/>
+            <a:ext cx="237744" cy="237744"/>
           </a:xfrm>
           <a:prstGeom prst="rect">
             <a:avLst/>
@@ -14823,7 +14823,7 @@
               <a:buNone/>
             </a:pPr>
             <a:r>
-              <a:rPr lang="en-US" sz="1100" b="1" dirty="0">
+              <a:rPr lang="en-US" sz="1000" b="1" dirty="0">
                 <a:solidFill>
                   <a:srgbClr val="FFFFFF"/>
                 </a:solidFill>
@@ -14833,7 +14833,7 @@
               </a:rPr>
               <a:t>✓</a:t>
             </a:r>
-            <a:endParaRPr lang="en-US" sz="1100" dirty="0"/>
+            <a:endParaRPr lang="en-US" sz="1000" dirty="0"/>
           </a:p>
         </p:txBody>
       </p:sp>
@@ -14845,8 +14845,8 @@
         </p:nvSpPr>
         <p:spPr>
           <a:xfrm>
-            <a:off x="841248" y="1682496"/>
-            <a:ext cx="3584448" cy="365760"/>
+            <a:off x="822960" y="1426464"/>
+            <a:ext cx="3602736" cy="329184"/>
           </a:xfrm>
           <a:prstGeom prst="rect">
             <a:avLst/>
@@ -14860,12 +14860,12 @@
           <a:p>
             <a:pPr indent="0" marL="0">
               <a:lnSpc>
-                <a:spcPct val="130000"/>
+                <a:spcPct val="120000"/>
               </a:lnSpc>
               <a:buNone/>
             </a:pPr>
             <a:r>
-              <a:rPr lang="en-US" sz="1100" dirty="0">
+              <a:rPr lang="en-US" sz="1050" dirty="0">
                 <a:solidFill>
                   <a:srgbClr val="333333"/>
                 </a:solidFill>
@@ -14875,7 +14875,7 @@
               </a:rPr>
               <a:t>提案資料の作成（料金比較表・整備証明・配送SLA一覧）</a:t>
             </a:r>
-            <a:endParaRPr lang="en-US" sz="1100" dirty="0"/>
+            <a:endParaRPr lang="en-US" sz="1050" dirty="0"/>
           </a:p>
         </p:txBody>
       </p:sp>
@@ -14887,8 +14887,8 @@
         </p:nvSpPr>
         <p:spPr>
           <a:xfrm>
-            <a:off x="502920" y="2249424"/>
-            <a:ext cx="256032" cy="256032"/>
+            <a:off x="502920" y="1828800"/>
+            <a:ext cx="237744" cy="237744"/>
           </a:xfrm>
           <a:prstGeom prst="rect">
             <a:avLst/>
@@ -14907,8 +14907,8 @@
         </p:nvSpPr>
         <p:spPr>
           <a:xfrm>
-            <a:off x="502920" y="2249424"/>
-            <a:ext cx="256032" cy="256032"/>
+            <a:off x="502920" y="1828800"/>
+            <a:ext cx="237744" cy="237744"/>
           </a:xfrm>
           <a:prstGeom prst="rect">
             <a:avLst/>
@@ -14924,7 +14924,7 @@
               <a:buNone/>
             </a:pPr>
             <a:r>
-              <a:rPr lang="en-US" sz="1100" b="1" dirty="0">
+              <a:rPr lang="en-US" sz="1000" b="1" dirty="0">
                 <a:solidFill>
                   <a:srgbClr val="FFFFFF"/>
                 </a:solidFill>
@@ -14934,7 +14934,7 @@
               </a:rPr>
               <a:t>✓</a:t>
             </a:r>
-            <a:endParaRPr lang="en-US" sz="1100" dirty="0"/>
+            <a:endParaRPr lang="en-US" sz="1000" dirty="0"/>
           </a:p>
         </p:txBody>
       </p:sp>
@@ -14946,8 +14946,8 @@
         </p:nvSpPr>
         <p:spPr>
           <a:xfrm>
-            <a:off x="841248" y="2231136"/>
-            <a:ext cx="3584448" cy="365760"/>
+            <a:off x="822960" y="1810512"/>
+            <a:ext cx="3602736" cy="329184"/>
           </a:xfrm>
           <a:prstGeom prst="rect">
             <a:avLst/>
@@ -14961,12 +14961,12 @@
           <a:p>
             <a:pPr indent="0" marL="0">
               <a:lnSpc>
-                <a:spcPct val="130000"/>
+                <a:spcPct val="120000"/>
               </a:lnSpc>
               <a:buNone/>
             </a:pPr>
             <a:r>
-              <a:rPr lang="en-US" sz="1100" dirty="0">
+              <a:rPr lang="en-US" sz="1050" dirty="0">
                 <a:solidFill>
                   <a:srgbClr val="333333"/>
                 </a:solidFill>
@@ -14976,7 +14976,7 @@
               </a:rPr>
               <a:t>レベニューシェア条件の設計（成約2,000円/件）</a:t>
             </a:r>
-            <a:endParaRPr lang="en-US" sz="1100" dirty="0"/>
+            <a:endParaRPr lang="en-US" sz="1050" dirty="0"/>
           </a:p>
         </p:txBody>
       </p:sp>
@@ -14988,8 +14988,8 @@
         </p:nvSpPr>
         <p:spPr>
           <a:xfrm>
-            <a:off x="365760" y="2916936"/>
-            <a:ext cx="4160520" cy="2084832"/>
+            <a:off x="365760" y="2304288"/>
+            <a:ext cx="4160520" cy="1481328"/>
           </a:xfrm>
           <a:prstGeom prst="rect">
             <a:avLst/>
@@ -15013,8 +15013,8 @@
         </p:nvSpPr>
         <p:spPr>
           <a:xfrm>
-            <a:off x="365760" y="2916936"/>
-            <a:ext cx="4160520" cy="292608"/>
+            <a:off x="365760" y="2304288"/>
+            <a:ext cx="4160520" cy="256032"/>
           </a:xfrm>
           <a:prstGeom prst="rect">
             <a:avLst/>
@@ -15033,8 +15033,8 @@
         </p:nvSpPr>
         <p:spPr>
           <a:xfrm>
-            <a:off x="365760" y="2916936"/>
-            <a:ext cx="4160520" cy="292608"/>
+            <a:off x="365760" y="2304288"/>
+            <a:ext cx="4160520" cy="256032"/>
           </a:xfrm>
           <a:prstGeom prst="rect">
             <a:avLst/>
@@ -15053,8 +15053,8 @@
         </p:nvSpPr>
         <p:spPr>
           <a:xfrm>
-            <a:off x="365760" y="2916936"/>
-            <a:ext cx="4160520" cy="292608"/>
+            <a:off x="365760" y="2304288"/>
+            <a:ext cx="4160520" cy="256032"/>
           </a:xfrm>
           <a:prstGeom prst="rect">
             <a:avLst/>
@@ -15092,8 +15092,8 @@
         </p:nvSpPr>
         <p:spPr>
           <a:xfrm>
-            <a:off x="502920" y="3300984"/>
-            <a:ext cx="256032" cy="256032"/>
+            <a:off x="502920" y="2633472"/>
+            <a:ext cx="237744" cy="237744"/>
           </a:xfrm>
           <a:prstGeom prst="rect">
             <a:avLst/>
@@ -15112,8 +15112,8 @@
         </p:nvSpPr>
         <p:spPr>
           <a:xfrm>
-            <a:off x="502920" y="3300984"/>
-            <a:ext cx="256032" cy="256032"/>
+            <a:off x="502920" y="2633472"/>
+            <a:ext cx="237744" cy="237744"/>
           </a:xfrm>
           <a:prstGeom prst="rect">
             <a:avLst/>
@@ -15129,7 +15129,7 @@
               <a:buNone/>
             </a:pPr>
             <a:r>
-              <a:rPr lang="en-US" sz="1100" b="1" dirty="0">
+              <a:rPr lang="en-US" sz="1000" b="1" dirty="0">
                 <a:solidFill>
                   <a:srgbClr val="FFFFFF"/>
                 </a:solidFill>
@@ -15139,7 +15139,7 @@
               </a:rPr>
               <a:t>✓</a:t>
             </a:r>
-            <a:endParaRPr lang="en-US" sz="1100" dirty="0"/>
+            <a:endParaRPr lang="en-US" sz="1000" dirty="0"/>
           </a:p>
         </p:txBody>
       </p:sp>
@@ -15151,8 +15151,8 @@
         </p:nvSpPr>
         <p:spPr>
           <a:xfrm>
-            <a:off x="841248" y="3282696"/>
-            <a:ext cx="3584448" cy="365760"/>
+            <a:off x="822960" y="2615184"/>
+            <a:ext cx="3602736" cy="329184"/>
           </a:xfrm>
           <a:prstGeom prst="rect">
             <a:avLst/>
@@ -15166,12 +15166,12 @@
           <a:p>
             <a:pPr indent="0" marL="0">
               <a:lnSpc>
-                <a:spcPct val="130000"/>
+                <a:spcPct val="120000"/>
               </a:lnSpc>
               <a:buNone/>
             </a:pPr>
             <a:r>
-              <a:rPr lang="en-US" sz="1100" dirty="0">
+              <a:rPr lang="en-US" sz="1050" dirty="0">
                 <a:solidFill>
                   <a:srgbClr val="333333"/>
                 </a:solidFill>
@@ -15181,7 +15181,7 @@
               </a:rPr>
               <a:t>サキュレ回収品から使用可能な家電台数の棚卸し（目標：200〜300台）</a:t>
             </a:r>
-            <a:endParaRPr lang="en-US" sz="1100" dirty="0"/>
+            <a:endParaRPr lang="en-US" sz="1050" dirty="0"/>
           </a:p>
         </p:txBody>
       </p:sp>
@@ -15193,8 +15193,8 @@
         </p:nvSpPr>
         <p:spPr>
           <a:xfrm>
-            <a:off x="502920" y="3849624"/>
-            <a:ext cx="256032" cy="256032"/>
+            <a:off x="502920" y="3017520"/>
+            <a:ext cx="237744" cy="237744"/>
           </a:xfrm>
           <a:prstGeom prst="rect">
             <a:avLst/>
@@ -15213,8 +15213,8 @@
         </p:nvSpPr>
         <p:spPr>
           <a:xfrm>
-            <a:off x="502920" y="3849624"/>
-            <a:ext cx="256032" cy="256032"/>
+            <a:off x="502920" y="3017520"/>
+            <a:ext cx="237744" cy="237744"/>
           </a:xfrm>
           <a:prstGeom prst="rect">
             <a:avLst/>
@@ -15230,7 +15230,7 @@
               <a:buNone/>
             </a:pPr>
             <a:r>
-              <a:rPr lang="en-US" sz="1100" b="1" dirty="0">
+              <a:rPr lang="en-US" sz="1000" b="1" dirty="0">
                 <a:solidFill>
                   <a:srgbClr val="FFFFFF"/>
                 </a:solidFill>
@@ -15240,7 +15240,7 @@
               </a:rPr>
               <a:t>✓</a:t>
             </a:r>
-            <a:endParaRPr lang="en-US" sz="1100" dirty="0"/>
+            <a:endParaRPr lang="en-US" sz="1000" dirty="0"/>
           </a:p>
         </p:txBody>
       </p:sp>
@@ -15252,8 +15252,8 @@
         </p:nvSpPr>
         <p:spPr>
           <a:xfrm>
-            <a:off x="841248" y="3831336"/>
-            <a:ext cx="3584448" cy="365760"/>
+            <a:off x="822960" y="2999232"/>
+            <a:ext cx="3602736" cy="329184"/>
           </a:xfrm>
           <a:prstGeom prst="rect">
             <a:avLst/>
@@ -15267,12 +15267,12 @@
           <a:p>
             <a:pPr indent="0" marL="0">
               <a:lnSpc>
-                <a:spcPct val="130000"/>
+                <a:spcPct val="120000"/>
               </a:lnSpc>
               <a:buNone/>
             </a:pPr>
             <a:r>
-              <a:rPr lang="en-US" sz="1100" dirty="0">
+              <a:rPr lang="en-US" sz="1050" dirty="0">
                 <a:solidFill>
                   <a:srgbClr val="333333"/>
                 </a:solidFill>
@@ -15282,7 +15282,7 @@
               </a:rPr>
               <a:t>整備チェックシートの作成（動作確認・クリーニング・年式確認）</a:t>
             </a:r>
-            <a:endParaRPr lang="en-US" sz="1100" dirty="0"/>
+            <a:endParaRPr lang="en-US" sz="1050" dirty="0"/>
           </a:p>
         </p:txBody>
       </p:sp>
@@ -15294,8 +15294,8 @@
         </p:nvSpPr>
         <p:spPr>
           <a:xfrm>
-            <a:off x="502920" y="4398264"/>
-            <a:ext cx="256032" cy="256032"/>
+            <a:off x="502920" y="3401568"/>
+            <a:ext cx="237744" cy="237744"/>
           </a:xfrm>
           <a:prstGeom prst="rect">
             <a:avLst/>
@@ -15314,8 +15314,8 @@
         </p:nvSpPr>
         <p:spPr>
           <a:xfrm>
-            <a:off x="502920" y="4398264"/>
-            <a:ext cx="256032" cy="256032"/>
+            <a:off x="502920" y="3401568"/>
+            <a:ext cx="237744" cy="237744"/>
           </a:xfrm>
           <a:prstGeom prst="rect">
             <a:avLst/>
@@ -15331,7 +15331,7 @@
               <a:buNone/>
             </a:pPr>
             <a:r>
-              <a:rPr lang="en-US" sz="1100" b="1" dirty="0">
+              <a:rPr lang="en-US" sz="1000" b="1" dirty="0">
                 <a:solidFill>
                   <a:srgbClr val="FFFFFF"/>
                 </a:solidFill>
@@ -15341,7 +15341,7 @@
               </a:rPr>
               <a:t>✓</a:t>
             </a:r>
-            <a:endParaRPr lang="en-US" sz="1100" dirty="0"/>
+            <a:endParaRPr lang="en-US" sz="1000" dirty="0"/>
           </a:p>
         </p:txBody>
       </p:sp>
@@ -15353,8 +15353,8 @@
         </p:nvSpPr>
         <p:spPr>
           <a:xfrm>
-            <a:off x="841248" y="4379976"/>
-            <a:ext cx="3584448" cy="365760"/>
+            <a:off x="822960" y="3383280"/>
+            <a:ext cx="3602736" cy="329184"/>
           </a:xfrm>
           <a:prstGeom prst="rect">
             <a:avLst/>
@@ -15368,12 +15368,12 @@
           <a:p>
             <a:pPr indent="0" marL="0">
               <a:lnSpc>
-                <a:spcPct val="130000"/>
+                <a:spcPct val="120000"/>
               </a:lnSpc>
               <a:buNone/>
             </a:pPr>
             <a:r>
-              <a:rPr lang="en-US" sz="1100" dirty="0">
+              <a:rPr lang="en-US" sz="1050" dirty="0">
                 <a:solidFill>
                   <a:srgbClr val="333333"/>
                 </a:solidFill>
@@ -15383,7 +15383,7 @@
               </a:rPr>
               <a:t>整備済みシールのデザイン・発注</a:t>
             </a:r>
-            <a:endParaRPr lang="en-US" sz="1100" dirty="0"/>
+            <a:endParaRPr lang="en-US" sz="1050" dirty="0"/>
           </a:p>
         </p:txBody>
       </p:sp>
@@ -15395,8 +15395,8 @@
         </p:nvSpPr>
         <p:spPr>
           <a:xfrm>
-            <a:off x="4709160" y="768096"/>
-            <a:ext cx="4160520" cy="2084832"/>
+            <a:off x="4709160" y="731520"/>
+            <a:ext cx="4160520" cy="1481328"/>
           </a:xfrm>
           <a:prstGeom prst="rect">
             <a:avLst/>
@@ -15420,8 +15420,8 @@
         </p:nvSpPr>
         <p:spPr>
           <a:xfrm>
-            <a:off x="4709160" y="768096"/>
-            <a:ext cx="4160520" cy="292608"/>
+            <a:off x="4709160" y="731520"/>
+            <a:ext cx="4160520" cy="256032"/>
           </a:xfrm>
           <a:prstGeom prst="rect">
             <a:avLst/>
@@ -15440,8 +15440,8 @@
         </p:nvSpPr>
         <p:spPr>
           <a:xfrm>
-            <a:off x="4709160" y="768096"/>
-            <a:ext cx="4160520" cy="292608"/>
+            <a:off x="4709160" y="731520"/>
+            <a:ext cx="4160520" cy="256032"/>
           </a:xfrm>
           <a:prstGeom prst="rect">
             <a:avLst/>
@@ -15460,8 +15460,8 @@
         </p:nvSpPr>
         <p:spPr>
           <a:xfrm>
-            <a:off x="4709160" y="768096"/>
-            <a:ext cx="4160520" cy="292608"/>
+            <a:off x="4709160" y="731520"/>
+            <a:ext cx="4160520" cy="256032"/>
           </a:xfrm>
           <a:prstGeom prst="rect">
             <a:avLst/>
@@ -15499,8 +15499,8 @@
         </p:nvSpPr>
         <p:spPr>
           <a:xfrm>
-            <a:off x="4846320" y="1152144"/>
-            <a:ext cx="256032" cy="256032"/>
+            <a:off x="4846320" y="1060704"/>
+            <a:ext cx="237744" cy="237744"/>
           </a:xfrm>
           <a:prstGeom prst="rect">
             <a:avLst/>
@@ -15519,8 +15519,8 @@
         </p:nvSpPr>
         <p:spPr>
           <a:xfrm>
-            <a:off x="4846320" y="1152144"/>
-            <a:ext cx="256032" cy="256032"/>
+            <a:off x="4846320" y="1060704"/>
+            <a:ext cx="237744" cy="237744"/>
           </a:xfrm>
           <a:prstGeom prst="rect">
             <a:avLst/>
@@ -15536,7 +15536,7 @@
               <a:buNone/>
             </a:pPr>
             <a:r>
-              <a:rPr lang="en-US" sz="1100" b="1" dirty="0">
+              <a:rPr lang="en-US" sz="1000" b="1" dirty="0">
                 <a:solidFill>
                   <a:srgbClr val="FFFFFF"/>
                 </a:solidFill>
@@ -15546,7 +15546,7 @@
               </a:rPr>
               <a:t>✓</a:t>
             </a:r>
-            <a:endParaRPr lang="en-US" sz="1100" dirty="0"/>
+            <a:endParaRPr lang="en-US" sz="1000" dirty="0"/>
           </a:p>
         </p:txBody>
       </p:sp>
@@ -15558,8 +15558,8 @@
         </p:nvSpPr>
         <p:spPr>
           <a:xfrm>
-            <a:off x="5184648" y="1133856"/>
-            <a:ext cx="3584448" cy="365760"/>
+            <a:off x="5166360" y="1042416"/>
+            <a:ext cx="3602736" cy="329184"/>
           </a:xfrm>
           <a:prstGeom prst="rect">
             <a:avLst/>
@@ -15573,12 +15573,12 @@
           <a:p>
             <a:pPr indent="0" marL="0">
               <a:lnSpc>
-                <a:spcPct val="130000"/>
+                <a:spcPct val="120000"/>
               </a:lnSpc>
               <a:buNone/>
             </a:pPr>
             <a:r>
-              <a:rPr lang="en-US" sz="1100" dirty="0">
+              <a:rPr lang="en-US" sz="1050" dirty="0">
                 <a:solidFill>
                   <a:srgbClr val="333333"/>
                 </a:solidFill>
@@ -15588,7 +15588,7 @@
               </a:rPr>
               <a:t>古物商許可の取得状況確認（未取得の場合は申請着手）</a:t>
             </a:r>
-            <a:endParaRPr lang="en-US" sz="1100" dirty="0"/>
+            <a:endParaRPr lang="en-US" sz="1050" dirty="0"/>
           </a:p>
         </p:txBody>
       </p:sp>
@@ -15600,8 +15600,8 @@
         </p:nvSpPr>
         <p:spPr>
           <a:xfrm>
-            <a:off x="4846320" y="1700784"/>
-            <a:ext cx="256032" cy="256032"/>
+            <a:off x="4846320" y="1444752"/>
+            <a:ext cx="237744" cy="237744"/>
           </a:xfrm>
           <a:prstGeom prst="rect">
             <a:avLst/>
@@ -15620,8 +15620,8 @@
         </p:nvSpPr>
         <p:spPr>
           <a:xfrm>
-            <a:off x="4846320" y="1700784"/>
-            <a:ext cx="256032" cy="256032"/>
+            <a:off x="4846320" y="1444752"/>
+            <a:ext cx="237744" cy="237744"/>
           </a:xfrm>
           <a:prstGeom prst="rect">
             <a:avLst/>
@@ -15637,7 +15637,7 @@
               <a:buNone/>
             </a:pPr>
             <a:r>
-              <a:rPr lang="en-US" sz="1100" b="1" dirty="0">
+              <a:rPr lang="en-US" sz="1000" b="1" dirty="0">
                 <a:solidFill>
                   <a:srgbClr val="FFFFFF"/>
                 </a:solidFill>
@@ -15647,7 +15647,7 @@
               </a:rPr>
               <a:t>✓</a:t>
             </a:r>
-            <a:endParaRPr lang="en-US" sz="1100" dirty="0"/>
+            <a:endParaRPr lang="en-US" sz="1000" dirty="0"/>
           </a:p>
         </p:txBody>
       </p:sp>
@@ -15659,8 +15659,8 @@
         </p:nvSpPr>
         <p:spPr>
           <a:xfrm>
-            <a:off x="5184648" y="1682496"/>
-            <a:ext cx="3584448" cy="365760"/>
+            <a:off x="5166360" y="1426464"/>
+            <a:ext cx="3602736" cy="329184"/>
           </a:xfrm>
           <a:prstGeom prst="rect">
             <a:avLst/>
@@ -15674,12 +15674,12 @@
           <a:p>
             <a:pPr indent="0" marL="0">
               <a:lnSpc>
-                <a:spcPct val="130000"/>
+                <a:spcPct val="120000"/>
               </a:lnSpc>
               <a:buNone/>
             </a:pPr>
             <a:r>
-              <a:rPr lang="en-US" sz="1100" dirty="0">
+              <a:rPr lang="en-US" sz="1050" dirty="0">
                 <a:solidFill>
                   <a:srgbClr val="333333"/>
                 </a:solidFill>
@@ -15689,7 +15689,7 @@
               </a:rPr>
               <a:t>PSE・電安法対応チェック（対象品目の確認）</a:t>
             </a:r>
-            <a:endParaRPr lang="en-US" sz="1100" dirty="0"/>
+            <a:endParaRPr lang="en-US" sz="1050" dirty="0"/>
           </a:p>
         </p:txBody>
       </p:sp>
@@ -15701,8 +15701,8 @@
         </p:nvSpPr>
         <p:spPr>
           <a:xfrm>
-            <a:off x="4846320" y="2249424"/>
-            <a:ext cx="256032" cy="256032"/>
+            <a:off x="4846320" y="1828800"/>
+            <a:ext cx="237744" cy="237744"/>
           </a:xfrm>
           <a:prstGeom prst="rect">
             <a:avLst/>
@@ -15721,8 +15721,8 @@
         </p:nvSpPr>
         <p:spPr>
           <a:xfrm>
-            <a:off x="4846320" y="2249424"/>
-            <a:ext cx="256032" cy="256032"/>
+            <a:off x="4846320" y="1828800"/>
+            <a:ext cx="237744" cy="237744"/>
           </a:xfrm>
           <a:prstGeom prst="rect">
             <a:avLst/>
@@ -15738,7 +15738,7 @@
               <a:buNone/>
             </a:pPr>
             <a:r>
-              <a:rPr lang="en-US" sz="1100" b="1" dirty="0">
+              <a:rPr lang="en-US" sz="1000" b="1" dirty="0">
                 <a:solidFill>
                   <a:srgbClr val="FFFFFF"/>
                 </a:solidFill>
@@ -15748,7 +15748,7 @@
               </a:rPr>
               <a:t>✓</a:t>
             </a:r>
-            <a:endParaRPr lang="en-US" sz="1100" dirty="0"/>
+            <a:endParaRPr lang="en-US" sz="1000" dirty="0"/>
           </a:p>
         </p:txBody>
       </p:sp>
@@ -15760,8 +15760,8 @@
         </p:nvSpPr>
         <p:spPr>
           <a:xfrm>
-            <a:off x="5184648" y="2231136"/>
-            <a:ext cx="3584448" cy="365760"/>
+            <a:off x="5166360" y="1810512"/>
+            <a:ext cx="3602736" cy="329184"/>
           </a:xfrm>
           <a:prstGeom prst="rect">
             <a:avLst/>
@@ -15775,12 +15775,12 @@
           <a:p>
             <a:pPr indent="0" marL="0">
               <a:lnSpc>
-                <a:spcPct val="130000"/>
+                <a:spcPct val="120000"/>
               </a:lnSpc>
               <a:buNone/>
             </a:pPr>
             <a:r>
-              <a:rPr lang="en-US" sz="1100" dirty="0">
+              <a:rPr lang="en-US" sz="1050" dirty="0">
                 <a:solidFill>
                   <a:srgbClr val="333333"/>
                 </a:solidFill>
@@ -15790,7 +15790,7 @@
               </a:rPr>
               <a:t>レンタル契約書のひな形作成（弁護士・行政書士と確認）</a:t>
             </a:r>
-            <a:endParaRPr lang="en-US" sz="1100" dirty="0"/>
+            <a:endParaRPr lang="en-US" sz="1050" dirty="0"/>
           </a:p>
         </p:txBody>
       </p:sp>
@@ -15802,8 +15802,8 @@
         </p:nvSpPr>
         <p:spPr>
           <a:xfrm>
-            <a:off x="4709160" y="2916936"/>
-            <a:ext cx="4160520" cy="1901952"/>
+            <a:off x="4709160" y="2304288"/>
+            <a:ext cx="4160520" cy="1481328"/>
           </a:xfrm>
           <a:prstGeom prst="rect">
             <a:avLst/>
@@ -15827,8 +15827,8 @@
         </p:nvSpPr>
         <p:spPr>
           <a:xfrm>
-            <a:off x="4709160" y="2916936"/>
-            <a:ext cx="4160520" cy="292608"/>
+            <a:off x="4709160" y="2304288"/>
+            <a:ext cx="4160520" cy="256032"/>
           </a:xfrm>
           <a:prstGeom prst="rect">
             <a:avLst/>
@@ -15847,8 +15847,8 @@
         </p:nvSpPr>
         <p:spPr>
           <a:xfrm>
-            <a:off x="4709160" y="2916936"/>
-            <a:ext cx="4160520" cy="292608"/>
+            <a:off x="4709160" y="2304288"/>
+            <a:ext cx="4160520" cy="256032"/>
           </a:xfrm>
           <a:prstGeom prst="rect">
             <a:avLst/>
@@ -15867,8 +15867,8 @@
         </p:nvSpPr>
         <p:spPr>
           <a:xfrm>
-            <a:off x="4709160" y="2916936"/>
-            <a:ext cx="4160520" cy="292608"/>
+            <a:off x="4709160" y="2304288"/>
+            <a:ext cx="4160520" cy="256032"/>
           </a:xfrm>
           <a:prstGeom prst="rect">
             <a:avLst/>
@@ -15906,8 +15906,8 @@
         </p:nvSpPr>
         <p:spPr>
           <a:xfrm>
-            <a:off x="4846320" y="3300984"/>
-            <a:ext cx="256032" cy="256032"/>
+            <a:off x="4846320" y="2633472"/>
+            <a:ext cx="237744" cy="237744"/>
           </a:xfrm>
           <a:prstGeom prst="rect">
             <a:avLst/>
@@ -15926,8 +15926,8 @@
         </p:nvSpPr>
         <p:spPr>
           <a:xfrm>
-            <a:off x="4846320" y="3300984"/>
-            <a:ext cx="256032" cy="256032"/>
+            <a:off x="4846320" y="2633472"/>
+            <a:ext cx="237744" cy="237744"/>
           </a:xfrm>
           <a:prstGeom prst="rect">
             <a:avLst/>
@@ -15943,7 +15943,7 @@
               <a:buNone/>
             </a:pPr>
             <a:r>
-              <a:rPr lang="en-US" sz="1100" b="1" dirty="0">
+              <a:rPr lang="en-US" sz="1000" b="1" dirty="0">
                 <a:solidFill>
                   <a:srgbClr val="FFFFFF"/>
                 </a:solidFill>
@@ -15953,7 +15953,7 @@
               </a:rPr>
               <a:t>✓</a:t>
             </a:r>
-            <a:endParaRPr lang="en-US" sz="1100" dirty="0"/>
+            <a:endParaRPr lang="en-US" sz="1000" dirty="0"/>
           </a:p>
         </p:txBody>
       </p:sp>
@@ -15965,8 +15965,8 @@
         </p:nvSpPr>
         <p:spPr>
           <a:xfrm>
-            <a:off x="5184648" y="3282696"/>
-            <a:ext cx="3584448" cy="365760"/>
+            <a:off x="5166360" y="2615184"/>
+            <a:ext cx="3602736" cy="329184"/>
           </a:xfrm>
           <a:prstGeom prst="rect">
             <a:avLst/>
@@ -15980,12 +15980,12 @@
           <a:p>
             <a:pPr indent="0" marL="0">
               <a:lnSpc>
-                <a:spcPct val="130000"/>
+                <a:spcPct val="120000"/>
               </a:lnSpc>
               <a:buNone/>
             </a:pPr>
             <a:r>
-              <a:rPr lang="en-US" sz="1100" dirty="0">
+              <a:rPr lang="en-US" sz="1050" dirty="0">
                 <a:solidFill>
                   <a:srgbClr val="333333"/>
                 </a:solidFill>
@@ -15995,7 +15995,7 @@
               </a:rPr>
               <a:t>初期投資額の試算（整備費・消耗品・営業費）</a:t>
             </a:r>
-            <a:endParaRPr lang="en-US" sz="1100" dirty="0"/>
+            <a:endParaRPr lang="en-US" sz="1050" dirty="0"/>
           </a:p>
         </p:txBody>
       </p:sp>
@@ -16007,8 +16007,8 @@
         </p:nvSpPr>
         <p:spPr>
           <a:xfrm>
-            <a:off x="4846320" y="3849624"/>
-            <a:ext cx="256032" cy="256032"/>
+            <a:off x="4846320" y="3017520"/>
+            <a:ext cx="237744" cy="237744"/>
           </a:xfrm>
           <a:prstGeom prst="rect">
             <a:avLst/>
@@ -16027,8 +16027,8 @@
         </p:nvSpPr>
         <p:spPr>
           <a:xfrm>
-            <a:off x="4846320" y="3849624"/>
-            <a:ext cx="256032" cy="256032"/>
+            <a:off x="4846320" y="3017520"/>
+            <a:ext cx="237744" cy="237744"/>
           </a:xfrm>
           <a:prstGeom prst="rect">
             <a:avLst/>
@@ -16044,7 +16044,7 @@
               <a:buNone/>
             </a:pPr>
             <a:r>
-              <a:rPr lang="en-US" sz="1100" b="1" dirty="0">
+              <a:rPr lang="en-US" sz="1000" b="1" dirty="0">
                 <a:solidFill>
                   <a:srgbClr val="FFFFFF"/>
                 </a:solidFill>
@@ -16054,7 +16054,7 @@
               </a:rPr>
               <a:t>✓</a:t>
             </a:r>
-            <a:endParaRPr lang="en-US" sz="1100" dirty="0"/>
+            <a:endParaRPr lang="en-US" sz="1000" dirty="0"/>
           </a:p>
         </p:txBody>
       </p:sp>
@@ -16066,8 +16066,8 @@
         </p:nvSpPr>
         <p:spPr>
           <a:xfrm>
-            <a:off x="5184648" y="3831336"/>
-            <a:ext cx="3584448" cy="365760"/>
+            <a:off x="5166360" y="2999232"/>
+            <a:ext cx="3602736" cy="329184"/>
           </a:xfrm>
           <a:prstGeom prst="rect">
             <a:avLst/>
@@ -16081,12 +16081,12 @@
           <a:p>
             <a:pPr indent="0" marL="0">
               <a:lnSpc>
-                <a:spcPct val="130000"/>
+                <a:spcPct val="120000"/>
               </a:lnSpc>
               <a:buNone/>
             </a:pPr>
             <a:r>
-              <a:rPr lang="en-US" sz="1100" dirty="0">
+              <a:rPr lang="en-US" sz="1050" dirty="0">
                 <a:solidFill>
                   <a:srgbClr val="333333"/>
                 </a:solidFill>
@@ -16096,20 +16096,726 @@
               </a:rPr>
               <a:t>キャッシュフロー表の作成（仕入れ先行 → 3月回収の流れ）</a:t>
             </a:r>
+            <a:endParaRPr lang="en-US" sz="1050" dirty="0"/>
+          </a:p>
+        </p:txBody>
+      </p:sp>
+      <p:sp>
+        <p:nvSpPr>
+          <p:cNvPr id="56" name="Shape 54"/>
+          <p:cNvSpPr/>
+          <p:nvPr/>
+        </p:nvSpPr>
+        <p:spPr>
+          <a:xfrm>
+            <a:off x="365760" y="3858768"/>
+            <a:ext cx="8412480" cy="237744"/>
+          </a:xfrm>
+          <a:prstGeom prst="rect">
+            <a:avLst/>
+          </a:prstGeom>
+          <a:solidFill>
+            <a:srgbClr val="0D7480"/>
+          </a:solidFill>
+          <a:ln/>
+        </p:spPr>
+      </p:sp>
+      <p:sp>
+        <p:nvSpPr>
+          <p:cNvPr id="57" name="Text 55"/>
+          <p:cNvSpPr/>
+          <p:nvPr/>
+        </p:nvSpPr>
+        <p:spPr>
+          <a:xfrm>
+            <a:off x="502920" y="3858768"/>
+            <a:ext cx="4572000" cy="237744"/>
+          </a:xfrm>
+          <a:prstGeom prst="rect">
+            <a:avLst/>
+          </a:prstGeom>
+          <a:noFill/>
+          <a:ln/>
+        </p:spPr>
+        <p:txBody>
+          <a:bodyPr wrap="square" rtlCol="0" anchor="ctr"/>
+          <a:lstStyle/>
+          <a:p>
+            <a:pPr indent="0" marL="0">
+              <a:buNone/>
+            </a:pPr>
+            <a:r>
+              <a:rPr lang="en-US" sz="1100" b="1" dirty="0">
+                <a:solidFill>
+                  <a:srgbClr val="FFFFFF"/>
+                </a:solidFill>
+                <a:latin typeface="Calibri" pitchFamily="34" charset="0"/>
+                <a:ea typeface="Calibri" pitchFamily="34" charset="-122"/>
+                <a:cs typeface="Calibri" pitchFamily="34" charset="-120"/>
+              </a:rPr>
+              <a:t>大学訪問スケジュール</a:t>
+            </a:r>
             <a:endParaRPr lang="en-US" sz="1100" dirty="0"/>
           </a:p>
         </p:txBody>
       </p:sp>
       <p:sp>
         <p:nvSpPr>
-          <p:cNvPr id="56" name="Shape 54"/>
-          <p:cNvSpPr/>
-          <p:nvPr/>
-        </p:nvSpPr>
-        <p:spPr>
-          <a:xfrm>
-            <a:off x="365760" y="4736592"/>
-            <a:ext cx="8412480" cy="274320"/>
+          <p:cNvPr id="58" name="Text 56"/>
+          <p:cNvSpPr/>
+          <p:nvPr/>
+        </p:nvSpPr>
+        <p:spPr>
+          <a:xfrm>
+            <a:off x="5120640" y="3858768"/>
+            <a:ext cx="3566160" cy="237744"/>
+          </a:xfrm>
+          <a:prstGeom prst="rect">
+            <a:avLst/>
+          </a:prstGeom>
+          <a:noFill/>
+          <a:ln/>
+        </p:spPr>
+        <p:txBody>
+          <a:bodyPr wrap="square" rtlCol="0" anchor="ctr"/>
+          <a:lstStyle/>
+          <a:p>
+            <a:pPr algn="r" indent="0" marL="0">
+              <a:buNone/>
+            </a:pPr>
+            <a:r>
+              <a:rPr lang="en-US" sz="900" dirty="0">
+                <a:solidFill>
+                  <a:srgbClr val="FFFFFF"/>
+                </a:solidFill>
+                <a:latin typeface="Calibri" pitchFamily="34" charset="0"/>
+                <a:ea typeface="Calibri" pitchFamily="34" charset="-122"/>
+                <a:cs typeface="Calibri" pitchFamily="34" charset="-120"/>
+              </a:rPr>
+              <a:t>※アポ確定次第随時更新</a:t>
+            </a:r>
+            <a:endParaRPr lang="en-US" sz="900" dirty="0"/>
+          </a:p>
+        </p:txBody>
+      </p:sp>
+      <p:sp>
+        <p:nvSpPr>
+          <p:cNvPr id="59" name="Shape 57"/>
+          <p:cNvSpPr/>
+          <p:nvPr/>
+        </p:nvSpPr>
+        <p:spPr>
+          <a:xfrm>
+            <a:off x="365760" y="4096512"/>
+            <a:ext cx="8412480" cy="201168"/>
+          </a:xfrm>
+          <a:prstGeom prst="rect">
+            <a:avLst/>
+          </a:prstGeom>
+          <a:solidFill>
+            <a:srgbClr val="CCCCCC"/>
+          </a:solidFill>
+          <a:ln/>
+        </p:spPr>
+      </p:sp>
+      <p:sp>
+        <p:nvSpPr>
+          <p:cNvPr id="60" name="Text 58"/>
+          <p:cNvSpPr/>
+          <p:nvPr/>
+        </p:nvSpPr>
+        <p:spPr>
+          <a:xfrm>
+            <a:off x="475488" y="4096512"/>
+            <a:ext cx="1280160" cy="201168"/>
+          </a:xfrm>
+          <a:prstGeom prst="rect">
+            <a:avLst/>
+          </a:prstGeom>
+          <a:noFill/>
+          <a:ln/>
+        </p:spPr>
+        <p:txBody>
+          <a:bodyPr wrap="square" rtlCol="0" anchor="ctr"/>
+          <a:lstStyle/>
+          <a:p>
+            <a:pPr indent="0" marL="0">
+              <a:buNone/>
+            </a:pPr>
+            <a:r>
+              <a:rPr lang="en-US" sz="950" b="1" dirty="0">
+                <a:solidFill>
+                  <a:srgbClr val="333333"/>
+                </a:solidFill>
+                <a:latin typeface="Calibri" pitchFamily="34" charset="0"/>
+                <a:ea typeface="Calibri" pitchFamily="34" charset="-122"/>
+                <a:cs typeface="Calibri" pitchFamily="34" charset="-120"/>
+              </a:rPr>
+              <a:t>日付</a:t>
+            </a:r>
+            <a:endParaRPr lang="en-US" sz="950" dirty="0"/>
+          </a:p>
+        </p:txBody>
+      </p:sp>
+      <p:sp>
+        <p:nvSpPr>
+          <p:cNvPr id="61" name="Text 59"/>
+          <p:cNvSpPr/>
+          <p:nvPr/>
+        </p:nvSpPr>
+        <p:spPr>
+          <a:xfrm>
+            <a:off x="1847088" y="4096512"/>
+            <a:ext cx="4937760" cy="201168"/>
+          </a:xfrm>
+          <a:prstGeom prst="rect">
+            <a:avLst/>
+          </a:prstGeom>
+          <a:noFill/>
+          <a:ln/>
+        </p:spPr>
+        <p:txBody>
+          <a:bodyPr wrap="square" rtlCol="0" anchor="ctr"/>
+          <a:lstStyle/>
+          <a:p>
+            <a:pPr indent="0" marL="0">
+              <a:buNone/>
+            </a:pPr>
+            <a:r>
+              <a:rPr lang="en-US" sz="950" b="1" dirty="0">
+                <a:solidFill>
+                  <a:srgbClr val="333333"/>
+                </a:solidFill>
+                <a:latin typeface="Calibri" pitchFamily="34" charset="0"/>
+                <a:ea typeface="Calibri" pitchFamily="34" charset="-122"/>
+                <a:cs typeface="Calibri" pitchFamily="34" charset="-120"/>
+              </a:rPr>
+              <a:t>訪問大学</a:t>
+            </a:r>
+            <a:endParaRPr lang="en-US" sz="950" dirty="0"/>
+          </a:p>
+        </p:txBody>
+      </p:sp>
+      <p:sp>
+        <p:nvSpPr>
+          <p:cNvPr id="62" name="Text 60"/>
+          <p:cNvSpPr/>
+          <p:nvPr/>
+        </p:nvSpPr>
+        <p:spPr>
+          <a:xfrm>
+            <a:off x="6784848" y="4096512"/>
+            <a:ext cx="1828800" cy="201168"/>
+          </a:xfrm>
+          <a:prstGeom prst="rect">
+            <a:avLst/>
+          </a:prstGeom>
+          <a:noFill/>
+          <a:ln/>
+        </p:spPr>
+        <p:txBody>
+          <a:bodyPr wrap="square" rtlCol="0" anchor="ctr"/>
+          <a:lstStyle/>
+          <a:p>
+            <a:pPr algn="ctr" indent="0" marL="0">
+              <a:buNone/>
+            </a:pPr>
+            <a:r>
+              <a:rPr lang="en-US" sz="950" b="1" dirty="0">
+                <a:solidFill>
+                  <a:srgbClr val="333333"/>
+                </a:solidFill>
+                <a:latin typeface="Calibri" pitchFamily="34" charset="0"/>
+                <a:ea typeface="Calibri" pitchFamily="34" charset="-122"/>
+                <a:cs typeface="Calibri" pitchFamily="34" charset="-120"/>
+              </a:rPr>
+              <a:t>ステータス</a:t>
+            </a:r>
+            <a:endParaRPr lang="en-US" sz="950" dirty="0"/>
+          </a:p>
+        </p:txBody>
+      </p:sp>
+      <p:sp>
+        <p:nvSpPr>
+          <p:cNvPr id="63" name="Shape 61"/>
+          <p:cNvSpPr/>
+          <p:nvPr/>
+        </p:nvSpPr>
+        <p:spPr>
+          <a:xfrm>
+            <a:off x="365760" y="4297680"/>
+            <a:ext cx="8412480" cy="201168"/>
+          </a:xfrm>
+          <a:prstGeom prst="rect">
+            <a:avLst/>
+          </a:prstGeom>
+          <a:solidFill>
+            <a:srgbClr val="FFFFFF"/>
+          </a:solidFill>
+          <a:ln/>
+        </p:spPr>
+      </p:sp>
+      <p:sp>
+        <p:nvSpPr>
+          <p:cNvPr id="64" name="Text 62"/>
+          <p:cNvSpPr/>
+          <p:nvPr/>
+        </p:nvSpPr>
+        <p:spPr>
+          <a:xfrm>
+            <a:off x="475488" y="4297680"/>
+            <a:ext cx="1280160" cy="201168"/>
+          </a:xfrm>
+          <a:prstGeom prst="rect">
+            <a:avLst/>
+          </a:prstGeom>
+          <a:noFill/>
+          <a:ln/>
+        </p:spPr>
+        <p:txBody>
+          <a:bodyPr wrap="square" rtlCol="0" anchor="ctr"/>
+          <a:lstStyle/>
+          <a:p>
+            <a:pPr indent="0" marL="0">
+              <a:buNone/>
+            </a:pPr>
+            <a:r>
+              <a:rPr lang="en-US" sz="950" b="1" dirty="0">
+                <a:solidFill>
+                  <a:srgbClr val="333333"/>
+                </a:solidFill>
+                <a:latin typeface="Calibri" pitchFamily="34" charset="0"/>
+                <a:ea typeface="Calibri" pitchFamily="34" charset="-122"/>
+                <a:cs typeface="Calibri" pitchFamily="34" charset="-120"/>
+              </a:rPr>
+              <a:t>7/27（月）</a:t>
+            </a:r>
+            <a:endParaRPr lang="en-US" sz="950" dirty="0"/>
+          </a:p>
+        </p:txBody>
+      </p:sp>
+      <p:sp>
+        <p:nvSpPr>
+          <p:cNvPr id="65" name="Text 63"/>
+          <p:cNvSpPr/>
+          <p:nvPr/>
+        </p:nvSpPr>
+        <p:spPr>
+          <a:xfrm>
+            <a:off x="1847088" y="4297680"/>
+            <a:ext cx="4846320" cy="201168"/>
+          </a:xfrm>
+          <a:prstGeom prst="rect">
+            <a:avLst/>
+          </a:prstGeom>
+          <a:noFill/>
+          <a:ln/>
+        </p:spPr>
+        <p:txBody>
+          <a:bodyPr wrap="square" rtlCol="0" anchor="ctr"/>
+          <a:lstStyle/>
+          <a:p>
+            <a:pPr indent="0" marL="0">
+              <a:buNone/>
+            </a:pPr>
+            <a:r>
+              <a:rPr lang="en-US" sz="950" dirty="0">
+                <a:solidFill>
+                  <a:srgbClr val="333333"/>
+                </a:solidFill>
+                <a:latin typeface="Calibri" pitchFamily="34" charset="0"/>
+                <a:ea typeface="Calibri" pitchFamily="34" charset="-122"/>
+                <a:cs typeface="Calibri" pitchFamily="34" charset="-120"/>
+              </a:rPr>
+              <a:t>大東文化大学・東洋大学・立教大学</a:t>
+            </a:r>
+            <a:endParaRPr lang="en-US" sz="950" dirty="0"/>
+          </a:p>
+        </p:txBody>
+      </p:sp>
+      <p:sp>
+        <p:nvSpPr>
+          <p:cNvPr id="66" name="Shape 64"/>
+          <p:cNvSpPr/>
+          <p:nvPr/>
+        </p:nvSpPr>
+        <p:spPr>
+          <a:xfrm>
+            <a:off x="6784848" y="4297680"/>
+            <a:ext cx="1737360" cy="201168"/>
+          </a:xfrm>
+          <a:prstGeom prst="rect">
+            <a:avLst/>
+          </a:prstGeom>
+          <a:solidFill>
+            <a:srgbClr val="156818"/>
+          </a:solidFill>
+          <a:ln/>
+        </p:spPr>
+      </p:sp>
+      <p:sp>
+        <p:nvSpPr>
+          <p:cNvPr id="67" name="Text 65"/>
+          <p:cNvSpPr/>
+          <p:nvPr/>
+        </p:nvSpPr>
+        <p:spPr>
+          <a:xfrm>
+            <a:off x="6784848" y="4297680"/>
+            <a:ext cx="1737360" cy="201168"/>
+          </a:xfrm>
+          <a:prstGeom prst="rect">
+            <a:avLst/>
+          </a:prstGeom>
+          <a:noFill/>
+          <a:ln/>
+        </p:spPr>
+        <p:txBody>
+          <a:bodyPr wrap="square" rtlCol="0" anchor="ctr"/>
+          <a:lstStyle/>
+          <a:p>
+            <a:pPr algn="ctr" indent="0" marL="0">
+              <a:buNone/>
+            </a:pPr>
+            <a:r>
+              <a:rPr lang="en-US" sz="950" b="1" dirty="0">
+                <a:solidFill>
+                  <a:srgbClr val="FFFFFF"/>
+                </a:solidFill>
+                <a:latin typeface="Calibri" pitchFamily="34" charset="0"/>
+                <a:ea typeface="Calibri" pitchFamily="34" charset="-122"/>
+                <a:cs typeface="Calibri" pitchFamily="34" charset="-120"/>
+              </a:rPr>
+              <a:t>確定</a:t>
+            </a:r>
+            <a:endParaRPr lang="en-US" sz="950" dirty="0"/>
+          </a:p>
+        </p:txBody>
+      </p:sp>
+      <p:sp>
+        <p:nvSpPr>
+          <p:cNvPr id="68" name="Shape 66"/>
+          <p:cNvSpPr/>
+          <p:nvPr/>
+        </p:nvSpPr>
+        <p:spPr>
+          <a:xfrm>
+            <a:off x="365760" y="4498848"/>
+            <a:ext cx="8412480" cy="201168"/>
+          </a:xfrm>
+          <a:prstGeom prst="rect">
+            <a:avLst/>
+          </a:prstGeom>
+          <a:solidFill>
+            <a:srgbClr val="F3F3F3"/>
+          </a:solidFill>
+          <a:ln/>
+        </p:spPr>
+      </p:sp>
+      <p:sp>
+        <p:nvSpPr>
+          <p:cNvPr id="69" name="Text 67"/>
+          <p:cNvSpPr/>
+          <p:nvPr/>
+        </p:nvSpPr>
+        <p:spPr>
+          <a:xfrm>
+            <a:off x="475488" y="4498848"/>
+            <a:ext cx="1280160" cy="201168"/>
+          </a:xfrm>
+          <a:prstGeom prst="rect">
+            <a:avLst/>
+          </a:prstGeom>
+          <a:noFill/>
+          <a:ln/>
+        </p:spPr>
+        <p:txBody>
+          <a:bodyPr wrap="square" rtlCol="0" anchor="ctr"/>
+          <a:lstStyle/>
+          <a:p>
+            <a:pPr indent="0" marL="0">
+              <a:buNone/>
+            </a:pPr>
+            <a:r>
+              <a:rPr lang="en-US" sz="950" dirty="0">
+                <a:solidFill>
+                  <a:srgbClr val="333333"/>
+                </a:solidFill>
+                <a:latin typeface="Calibri" pitchFamily="34" charset="0"/>
+                <a:ea typeface="Calibri" pitchFamily="34" charset="-122"/>
+                <a:cs typeface="Calibri" pitchFamily="34" charset="-120"/>
+              </a:rPr>
+              <a:t>調整中</a:t>
+            </a:r>
+            <a:endParaRPr lang="en-US" sz="950" dirty="0"/>
+          </a:p>
+        </p:txBody>
+      </p:sp>
+      <p:sp>
+        <p:nvSpPr>
+          <p:cNvPr id="70" name="Text 68"/>
+          <p:cNvSpPr/>
+          <p:nvPr/>
+        </p:nvSpPr>
+        <p:spPr>
+          <a:xfrm>
+            <a:off x="1847088" y="4498848"/>
+            <a:ext cx="4846320" cy="201168"/>
+          </a:xfrm>
+          <a:prstGeom prst="rect">
+            <a:avLst/>
+          </a:prstGeom>
+          <a:noFill/>
+          <a:ln/>
+        </p:spPr>
+        <p:txBody>
+          <a:bodyPr wrap="square" rtlCol="0" anchor="ctr"/>
+          <a:lstStyle/>
+          <a:p>
+            <a:pPr indent="0" marL="0">
+              <a:buNone/>
+            </a:pPr>
+            <a:r>
+              <a:rPr lang="en-US" sz="950" dirty="0">
+                <a:solidFill>
+                  <a:srgbClr val="333333"/>
+                </a:solidFill>
+                <a:latin typeface="Calibri" pitchFamily="34" charset="0"/>
+                <a:ea typeface="Calibri" pitchFamily="34" charset="-122"/>
+                <a:cs typeface="Calibri" pitchFamily="34" charset="-120"/>
+              </a:rPr>
+              <a:t>—</a:t>
+            </a:r>
+            <a:endParaRPr lang="en-US" sz="950" dirty="0"/>
+          </a:p>
+        </p:txBody>
+      </p:sp>
+      <p:sp>
+        <p:nvSpPr>
+          <p:cNvPr id="71" name="Shape 69"/>
+          <p:cNvSpPr/>
+          <p:nvPr/>
+        </p:nvSpPr>
+        <p:spPr>
+          <a:xfrm>
+            <a:off x="6784848" y="4498848"/>
+            <a:ext cx="1737360" cy="201168"/>
+          </a:xfrm>
+          <a:prstGeom prst="rect">
+            <a:avLst/>
+          </a:prstGeom>
+          <a:solidFill>
+            <a:srgbClr val="E65100"/>
+          </a:solidFill>
+          <a:ln/>
+        </p:spPr>
+      </p:sp>
+      <p:sp>
+        <p:nvSpPr>
+          <p:cNvPr id="72" name="Text 70"/>
+          <p:cNvSpPr/>
+          <p:nvPr/>
+        </p:nvSpPr>
+        <p:spPr>
+          <a:xfrm>
+            <a:off x="6784848" y="4498848"/>
+            <a:ext cx="1737360" cy="201168"/>
+          </a:xfrm>
+          <a:prstGeom prst="rect">
+            <a:avLst/>
+          </a:prstGeom>
+          <a:noFill/>
+          <a:ln/>
+        </p:spPr>
+        <p:txBody>
+          <a:bodyPr wrap="square" rtlCol="0" anchor="ctr"/>
+          <a:lstStyle/>
+          <a:p>
+            <a:pPr algn="ctr" indent="0" marL="0">
+              <a:buNone/>
+            </a:pPr>
+            <a:r>
+              <a:rPr lang="en-US" sz="950" b="1" dirty="0">
+                <a:solidFill>
+                  <a:srgbClr val="FFFFFF"/>
+                </a:solidFill>
+                <a:latin typeface="Calibri" pitchFamily="34" charset="0"/>
+                <a:ea typeface="Calibri" pitchFamily="34" charset="-122"/>
+                <a:cs typeface="Calibri" pitchFamily="34" charset="-120"/>
+              </a:rPr>
+              <a:t>アポ取得中</a:t>
+            </a:r>
+            <a:endParaRPr lang="en-US" sz="950" dirty="0"/>
+          </a:p>
+        </p:txBody>
+      </p:sp>
+      <p:sp>
+        <p:nvSpPr>
+          <p:cNvPr id="73" name="Shape 71"/>
+          <p:cNvSpPr/>
+          <p:nvPr/>
+        </p:nvSpPr>
+        <p:spPr>
+          <a:xfrm>
+            <a:off x="365760" y="4700016"/>
+            <a:ext cx="8412480" cy="201168"/>
+          </a:xfrm>
+          <a:prstGeom prst="rect">
+            <a:avLst/>
+          </a:prstGeom>
+          <a:solidFill>
+            <a:srgbClr val="FFFFFF"/>
+          </a:solidFill>
+          <a:ln/>
+        </p:spPr>
+      </p:sp>
+      <p:sp>
+        <p:nvSpPr>
+          <p:cNvPr id="74" name="Text 72"/>
+          <p:cNvSpPr/>
+          <p:nvPr/>
+        </p:nvSpPr>
+        <p:spPr>
+          <a:xfrm>
+            <a:off x="475488" y="4700016"/>
+            <a:ext cx="1280160" cy="201168"/>
+          </a:xfrm>
+          <a:prstGeom prst="rect">
+            <a:avLst/>
+          </a:prstGeom>
+          <a:noFill/>
+          <a:ln/>
+        </p:spPr>
+        <p:txBody>
+          <a:bodyPr wrap="square" rtlCol="0" anchor="ctr"/>
+          <a:lstStyle/>
+          <a:p>
+            <a:pPr indent="0" marL="0">
+              <a:buNone/>
+            </a:pPr>
+            <a:r>
+              <a:rPr lang="en-US" sz="950" dirty="0">
+                <a:solidFill>
+                  <a:srgbClr val="333333"/>
+                </a:solidFill>
+                <a:latin typeface="Calibri" pitchFamily="34" charset="0"/>
+                <a:ea typeface="Calibri" pitchFamily="34" charset="-122"/>
+                <a:cs typeface="Calibri" pitchFamily="34" charset="-120"/>
+              </a:rPr>
+              <a:t>調整中</a:t>
+            </a:r>
+            <a:endParaRPr lang="en-US" sz="950" dirty="0"/>
+          </a:p>
+        </p:txBody>
+      </p:sp>
+      <p:sp>
+        <p:nvSpPr>
+          <p:cNvPr id="75" name="Text 73"/>
+          <p:cNvSpPr/>
+          <p:nvPr/>
+        </p:nvSpPr>
+        <p:spPr>
+          <a:xfrm>
+            <a:off x="1847088" y="4700016"/>
+            <a:ext cx="4846320" cy="201168"/>
+          </a:xfrm>
+          <a:prstGeom prst="rect">
+            <a:avLst/>
+          </a:prstGeom>
+          <a:noFill/>
+          <a:ln/>
+        </p:spPr>
+        <p:txBody>
+          <a:bodyPr wrap="square" rtlCol="0" anchor="ctr"/>
+          <a:lstStyle/>
+          <a:p>
+            <a:pPr indent="0" marL="0">
+              <a:buNone/>
+            </a:pPr>
+            <a:r>
+              <a:rPr lang="en-US" sz="950" dirty="0">
+                <a:solidFill>
+                  <a:srgbClr val="333333"/>
+                </a:solidFill>
+                <a:latin typeface="Calibri" pitchFamily="34" charset="0"/>
+                <a:ea typeface="Calibri" pitchFamily="34" charset="-122"/>
+                <a:cs typeface="Calibri" pitchFamily="34" charset="-120"/>
+              </a:rPr>
+              <a:t>—</a:t>
+            </a:r>
+            <a:endParaRPr lang="en-US" sz="950" dirty="0"/>
+          </a:p>
+        </p:txBody>
+      </p:sp>
+      <p:sp>
+        <p:nvSpPr>
+          <p:cNvPr id="76" name="Shape 74"/>
+          <p:cNvSpPr/>
+          <p:nvPr/>
+        </p:nvSpPr>
+        <p:spPr>
+          <a:xfrm>
+            <a:off x="6784848" y="4700016"/>
+            <a:ext cx="1737360" cy="201168"/>
+          </a:xfrm>
+          <a:prstGeom prst="rect">
+            <a:avLst/>
+          </a:prstGeom>
+          <a:solidFill>
+            <a:srgbClr val="E65100"/>
+          </a:solidFill>
+          <a:ln/>
+        </p:spPr>
+      </p:sp>
+      <p:sp>
+        <p:nvSpPr>
+          <p:cNvPr id="77" name="Text 75"/>
+          <p:cNvSpPr/>
+          <p:nvPr/>
+        </p:nvSpPr>
+        <p:spPr>
+          <a:xfrm>
+            <a:off x="6784848" y="4700016"/>
+            <a:ext cx="1737360" cy="201168"/>
+          </a:xfrm>
+          <a:prstGeom prst="rect">
+            <a:avLst/>
+          </a:prstGeom>
+          <a:noFill/>
+          <a:ln/>
+        </p:spPr>
+        <p:txBody>
+          <a:bodyPr wrap="square" rtlCol="0" anchor="ctr"/>
+          <a:lstStyle/>
+          <a:p>
+            <a:pPr algn="ctr" indent="0" marL="0">
+              <a:buNone/>
+            </a:pPr>
+            <a:r>
+              <a:rPr lang="en-US" sz="950" b="1" dirty="0">
+                <a:solidFill>
+                  <a:srgbClr val="FFFFFF"/>
+                </a:solidFill>
+                <a:latin typeface="Calibri" pitchFamily="34" charset="0"/>
+                <a:ea typeface="Calibri" pitchFamily="34" charset="-122"/>
+                <a:cs typeface="Calibri" pitchFamily="34" charset="-120"/>
+              </a:rPr>
+              <a:t>アポ取得中</a:t>
+            </a:r>
+            <a:endParaRPr lang="en-US" sz="950" dirty="0"/>
+          </a:p>
+        </p:txBody>
+      </p:sp>
+      <p:sp>
+        <p:nvSpPr>
+          <p:cNvPr id="78" name="Shape 76"/>
+          <p:cNvSpPr/>
+          <p:nvPr/>
+        </p:nvSpPr>
+        <p:spPr>
+          <a:xfrm>
+            <a:off x="365760" y="4919472"/>
+            <a:ext cx="8412480" cy="201168"/>
           </a:xfrm>
           <a:prstGeom prst="rect">
             <a:avLst/>
@@ -16122,14 +16828,14 @@
       </p:sp>
       <p:sp>
         <p:nvSpPr>
-          <p:cNvPr id="57" name="Text 55"/>
-          <p:cNvSpPr/>
-          <p:nvPr/>
-        </p:nvSpPr>
-        <p:spPr>
-          <a:xfrm>
-            <a:off x="365760" y="4736592"/>
-            <a:ext cx="8412480" cy="274320"/>
+          <p:cNvPr id="79" name="Text 77"/>
+          <p:cNvSpPr/>
+          <p:nvPr/>
+        </p:nvSpPr>
+        <p:spPr>
+          <a:xfrm>
+            <a:off x="365760" y="4919472"/>
+            <a:ext cx="8412480" cy="201168"/>
           </a:xfrm>
           <a:prstGeom prst="rect">
             <a:avLst/>
@@ -16145,7 +16851,7 @@
               <a:buNone/>
             </a:pPr>
             <a:r>
-              <a:rPr lang="en-US" sz="1100" b="1" dirty="0">
+              <a:rPr lang="en-US" sz="1050" b="1" dirty="0">
                 <a:solidFill>
                   <a:srgbClr val="FFFFFF"/>
                 </a:solidFill>
@@ -16155,7 +16861,7 @@
               </a:rPr>
               <a:t>7月末時点でのチェック：リスト作成完了・棚卸し完了・提案資料初稿完成</a:t>
             </a:r>
-            <a:endParaRPr lang="en-US" sz="1100" dirty="0"/>
+            <a:endParaRPr lang="en-US" sz="1050" dirty="0"/>
           </a:p>
         </p:txBody>
       </p:sp>

--- a/事業計画書_営業戦略プラン_v2.pptx
+++ b/事業計画書_営業戦略プラン_v2.pptx
@@ -14582,7 +14582,7 @@
         <p:spPr>
           <a:xfrm>
             <a:off x="365760" y="731520"/>
-            <a:ext cx="4160520" cy="1481328"/>
+            <a:ext cx="4160520" cy="1417320"/>
           </a:xfrm>
           <a:prstGeom prst="rect">
             <a:avLst/>
@@ -14685,7 +14685,7 @@
         </p:nvSpPr>
         <p:spPr>
           <a:xfrm>
-            <a:off x="502920" y="1060704"/>
+            <a:off x="502920" y="1042416"/>
             <a:ext cx="237744" cy="237744"/>
           </a:xfrm>
           <a:prstGeom prst="rect">
@@ -14705,7 +14705,7 @@
         </p:nvSpPr>
         <p:spPr>
           <a:xfrm>
-            <a:off x="502920" y="1060704"/>
+            <a:off x="502920" y="1042416"/>
             <a:ext cx="237744" cy="237744"/>
           </a:xfrm>
           <a:prstGeom prst="rect">
@@ -14744,8 +14744,8 @@
         </p:nvSpPr>
         <p:spPr>
           <a:xfrm>
-            <a:off x="822960" y="1042416"/>
-            <a:ext cx="3602736" cy="329184"/>
+            <a:off x="822960" y="1024128"/>
+            <a:ext cx="3602736" cy="310896"/>
           </a:xfrm>
           <a:prstGeom prst="rect">
             <a:avLst/>
@@ -14772,7 +14772,7 @@
                 <a:ea typeface="Calibri" pitchFamily="34" charset="-122"/>
                 <a:cs typeface="Calibri" pitchFamily="34" charset="-120"/>
               </a:rPr>
-              <a:t>ターゲット生協リスト作成（50〜80校：大学名・担当部署・TEL）</a:t>
+              <a:t>対象36大学の洗い出しと訪問日程の仮決め（7月末までに完了）</a:t>
             </a:r>
             <a:endParaRPr lang="en-US" sz="1050" dirty="0"/>
           </a:p>
@@ -14786,7 +14786,7 @@
         </p:nvSpPr>
         <p:spPr>
           <a:xfrm>
-            <a:off x="502920" y="1444752"/>
+            <a:off x="502920" y="1389888"/>
             <a:ext cx="237744" cy="237744"/>
           </a:xfrm>
           <a:prstGeom prst="rect">
@@ -14806,7 +14806,7 @@
         </p:nvSpPr>
         <p:spPr>
           <a:xfrm>
-            <a:off x="502920" y="1444752"/>
+            <a:off x="502920" y="1389888"/>
             <a:ext cx="237744" cy="237744"/>
           </a:xfrm>
           <a:prstGeom prst="rect">
@@ -14845,8 +14845,8 @@
         </p:nvSpPr>
         <p:spPr>
           <a:xfrm>
-            <a:off x="822960" y="1426464"/>
-            <a:ext cx="3602736" cy="329184"/>
+            <a:off x="822960" y="1371600"/>
+            <a:ext cx="3602736" cy="310896"/>
           </a:xfrm>
           <a:prstGeom prst="rect">
             <a:avLst/>
@@ -14887,7 +14887,7 @@
         </p:nvSpPr>
         <p:spPr>
           <a:xfrm>
-            <a:off x="502920" y="1828800"/>
+            <a:off x="502920" y="1737360"/>
             <a:ext cx="237744" cy="237744"/>
           </a:xfrm>
           <a:prstGeom prst="rect">
@@ -14907,7 +14907,7 @@
         </p:nvSpPr>
         <p:spPr>
           <a:xfrm>
-            <a:off x="502920" y="1828800"/>
+            <a:off x="502920" y="1737360"/>
             <a:ext cx="237744" cy="237744"/>
           </a:xfrm>
           <a:prstGeom prst="rect">
@@ -14946,8 +14946,8 @@
         </p:nvSpPr>
         <p:spPr>
           <a:xfrm>
-            <a:off x="822960" y="1810512"/>
-            <a:ext cx="3602736" cy="329184"/>
+            <a:off x="822960" y="1719072"/>
+            <a:ext cx="3602736" cy="310896"/>
           </a:xfrm>
           <a:prstGeom prst="rect">
             <a:avLst/>
@@ -14988,8 +14988,8 @@
         </p:nvSpPr>
         <p:spPr>
           <a:xfrm>
-            <a:off x="365760" y="2304288"/>
-            <a:ext cx="4160520" cy="1481328"/>
+            <a:off x="365760" y="2221992"/>
+            <a:ext cx="4160520" cy="1417320"/>
           </a:xfrm>
           <a:prstGeom prst="rect">
             <a:avLst/>
@@ -15013,7 +15013,7 @@
         </p:nvSpPr>
         <p:spPr>
           <a:xfrm>
-            <a:off x="365760" y="2304288"/>
+            <a:off x="365760" y="2221992"/>
             <a:ext cx="4160520" cy="256032"/>
           </a:xfrm>
           <a:prstGeom prst="rect">
@@ -15033,7 +15033,7 @@
         </p:nvSpPr>
         <p:spPr>
           <a:xfrm>
-            <a:off x="365760" y="2304288"/>
+            <a:off x="365760" y="2221992"/>
             <a:ext cx="4160520" cy="256032"/>
           </a:xfrm>
           <a:prstGeom prst="rect">
@@ -15053,7 +15053,7 @@
         </p:nvSpPr>
         <p:spPr>
           <a:xfrm>
-            <a:off x="365760" y="2304288"/>
+            <a:off x="365760" y="2221992"/>
             <a:ext cx="4160520" cy="256032"/>
           </a:xfrm>
           <a:prstGeom prst="rect">
@@ -15092,7 +15092,7 @@
         </p:nvSpPr>
         <p:spPr>
           <a:xfrm>
-            <a:off x="502920" y="2633472"/>
+            <a:off x="502920" y="2532888"/>
             <a:ext cx="237744" cy="237744"/>
           </a:xfrm>
           <a:prstGeom prst="rect">
@@ -15112,7 +15112,7 @@
         </p:nvSpPr>
         <p:spPr>
           <a:xfrm>
-            <a:off x="502920" y="2633472"/>
+            <a:off x="502920" y="2532888"/>
             <a:ext cx="237744" cy="237744"/>
           </a:xfrm>
           <a:prstGeom prst="rect">
@@ -15151,8 +15151,8 @@
         </p:nvSpPr>
         <p:spPr>
           <a:xfrm>
-            <a:off x="822960" y="2615184"/>
-            <a:ext cx="3602736" cy="329184"/>
+            <a:off x="822960" y="2514600"/>
+            <a:ext cx="3602736" cy="310896"/>
           </a:xfrm>
           <a:prstGeom prst="rect">
             <a:avLst/>
@@ -15193,7 +15193,7 @@
         </p:nvSpPr>
         <p:spPr>
           <a:xfrm>
-            <a:off x="502920" y="3017520"/>
+            <a:off x="502920" y="2880360"/>
             <a:ext cx="237744" cy="237744"/>
           </a:xfrm>
           <a:prstGeom prst="rect">
@@ -15213,7 +15213,7 @@
         </p:nvSpPr>
         <p:spPr>
           <a:xfrm>
-            <a:off x="502920" y="3017520"/>
+            <a:off x="502920" y="2880360"/>
             <a:ext cx="237744" cy="237744"/>
           </a:xfrm>
           <a:prstGeom prst="rect">
@@ -15252,8 +15252,8 @@
         </p:nvSpPr>
         <p:spPr>
           <a:xfrm>
-            <a:off x="822960" y="2999232"/>
-            <a:ext cx="3602736" cy="329184"/>
+            <a:off x="822960" y="2862072"/>
+            <a:ext cx="3602736" cy="310896"/>
           </a:xfrm>
           <a:prstGeom prst="rect">
             <a:avLst/>
@@ -15294,7 +15294,7 @@
         </p:nvSpPr>
         <p:spPr>
           <a:xfrm>
-            <a:off x="502920" y="3401568"/>
+            <a:off x="502920" y="3227832"/>
             <a:ext cx="237744" cy="237744"/>
           </a:xfrm>
           <a:prstGeom prst="rect">
@@ -15314,7 +15314,7 @@
         </p:nvSpPr>
         <p:spPr>
           <a:xfrm>
-            <a:off x="502920" y="3401568"/>
+            <a:off x="502920" y="3227832"/>
             <a:ext cx="237744" cy="237744"/>
           </a:xfrm>
           <a:prstGeom prst="rect">
@@ -15353,8 +15353,8 @@
         </p:nvSpPr>
         <p:spPr>
           <a:xfrm>
-            <a:off x="822960" y="3383280"/>
-            <a:ext cx="3602736" cy="329184"/>
+            <a:off x="822960" y="3209544"/>
+            <a:ext cx="3602736" cy="310896"/>
           </a:xfrm>
           <a:prstGeom prst="rect">
             <a:avLst/>
@@ -15396,7 +15396,7 @@
         <p:spPr>
           <a:xfrm>
             <a:off x="4709160" y="731520"/>
-            <a:ext cx="4160520" cy="1481328"/>
+            <a:ext cx="4160520" cy="1417320"/>
           </a:xfrm>
           <a:prstGeom prst="rect">
             <a:avLst/>
@@ -15499,7 +15499,7 @@
         </p:nvSpPr>
         <p:spPr>
           <a:xfrm>
-            <a:off x="4846320" y="1060704"/>
+            <a:off x="4846320" y="1042416"/>
             <a:ext cx="237744" cy="237744"/>
           </a:xfrm>
           <a:prstGeom prst="rect">
@@ -15519,7 +15519,7 @@
         </p:nvSpPr>
         <p:spPr>
           <a:xfrm>
-            <a:off x="4846320" y="1060704"/>
+            <a:off x="4846320" y="1042416"/>
             <a:ext cx="237744" cy="237744"/>
           </a:xfrm>
           <a:prstGeom prst="rect">
@@ -15558,8 +15558,8 @@
         </p:nvSpPr>
         <p:spPr>
           <a:xfrm>
-            <a:off x="5166360" y="1042416"/>
-            <a:ext cx="3602736" cy="329184"/>
+            <a:off x="5166360" y="1024128"/>
+            <a:ext cx="3602736" cy="310896"/>
           </a:xfrm>
           <a:prstGeom prst="rect">
             <a:avLst/>
@@ -15600,7 +15600,7 @@
         </p:nvSpPr>
         <p:spPr>
           <a:xfrm>
-            <a:off x="4846320" y="1444752"/>
+            <a:off x="4846320" y="1389888"/>
             <a:ext cx="237744" cy="237744"/>
           </a:xfrm>
           <a:prstGeom prst="rect">
@@ -15620,7 +15620,7 @@
         </p:nvSpPr>
         <p:spPr>
           <a:xfrm>
-            <a:off x="4846320" y="1444752"/>
+            <a:off x="4846320" y="1389888"/>
             <a:ext cx="237744" cy="237744"/>
           </a:xfrm>
           <a:prstGeom prst="rect">
@@ -15659,8 +15659,8 @@
         </p:nvSpPr>
         <p:spPr>
           <a:xfrm>
-            <a:off x="5166360" y="1426464"/>
-            <a:ext cx="3602736" cy="329184"/>
+            <a:off x="5166360" y="1371600"/>
+            <a:ext cx="3602736" cy="310896"/>
           </a:xfrm>
           <a:prstGeom prst="rect">
             <a:avLst/>
@@ -15701,7 +15701,7 @@
         </p:nvSpPr>
         <p:spPr>
           <a:xfrm>
-            <a:off x="4846320" y="1828800"/>
+            <a:off x="4846320" y="1737360"/>
             <a:ext cx="237744" cy="237744"/>
           </a:xfrm>
           <a:prstGeom prst="rect">
@@ -15721,7 +15721,7 @@
         </p:nvSpPr>
         <p:spPr>
           <a:xfrm>
-            <a:off x="4846320" y="1828800"/>
+            <a:off x="4846320" y="1737360"/>
             <a:ext cx="237744" cy="237744"/>
           </a:xfrm>
           <a:prstGeom prst="rect">
@@ -15760,8 +15760,8 @@
         </p:nvSpPr>
         <p:spPr>
           <a:xfrm>
-            <a:off x="5166360" y="1810512"/>
-            <a:ext cx="3602736" cy="329184"/>
+            <a:off x="5166360" y="1719072"/>
+            <a:ext cx="3602736" cy="310896"/>
           </a:xfrm>
           <a:prstGeom prst="rect">
             <a:avLst/>
@@ -15802,8 +15802,8 @@
         </p:nvSpPr>
         <p:spPr>
           <a:xfrm>
-            <a:off x="4709160" y="2304288"/>
-            <a:ext cx="4160520" cy="1481328"/>
+            <a:off x="4709160" y="2221992"/>
+            <a:ext cx="4160520" cy="1417320"/>
           </a:xfrm>
           <a:prstGeom prst="rect">
             <a:avLst/>
@@ -15827,7 +15827,7 @@
         </p:nvSpPr>
         <p:spPr>
           <a:xfrm>
-            <a:off x="4709160" y="2304288"/>
+            <a:off x="4709160" y="2221992"/>
             <a:ext cx="4160520" cy="256032"/>
           </a:xfrm>
           <a:prstGeom prst="rect">
@@ -15847,7 +15847,7 @@
         </p:nvSpPr>
         <p:spPr>
           <a:xfrm>
-            <a:off x="4709160" y="2304288"/>
+            <a:off x="4709160" y="2221992"/>
             <a:ext cx="4160520" cy="256032"/>
           </a:xfrm>
           <a:prstGeom prst="rect">
@@ -15867,7 +15867,7 @@
         </p:nvSpPr>
         <p:spPr>
           <a:xfrm>
-            <a:off x="4709160" y="2304288"/>
+            <a:off x="4709160" y="2221992"/>
             <a:ext cx="4160520" cy="256032"/>
           </a:xfrm>
           <a:prstGeom prst="rect">
@@ -15906,7 +15906,7 @@
         </p:nvSpPr>
         <p:spPr>
           <a:xfrm>
-            <a:off x="4846320" y="2633472"/>
+            <a:off x="4846320" y="2532888"/>
             <a:ext cx="237744" cy="237744"/>
           </a:xfrm>
           <a:prstGeom prst="rect">
@@ -15926,7 +15926,7 @@
         </p:nvSpPr>
         <p:spPr>
           <a:xfrm>
-            <a:off x="4846320" y="2633472"/>
+            <a:off x="4846320" y="2532888"/>
             <a:ext cx="237744" cy="237744"/>
           </a:xfrm>
           <a:prstGeom prst="rect">
@@ -15965,8 +15965,8 @@
         </p:nvSpPr>
         <p:spPr>
           <a:xfrm>
-            <a:off x="5166360" y="2615184"/>
-            <a:ext cx="3602736" cy="329184"/>
+            <a:off x="5166360" y="2514600"/>
+            <a:ext cx="3602736" cy="310896"/>
           </a:xfrm>
           <a:prstGeom prst="rect">
             <a:avLst/>
@@ -16007,7 +16007,7 @@
         </p:nvSpPr>
         <p:spPr>
           <a:xfrm>
-            <a:off x="4846320" y="3017520"/>
+            <a:off x="4846320" y="2880360"/>
             <a:ext cx="237744" cy="237744"/>
           </a:xfrm>
           <a:prstGeom prst="rect">
@@ -16027,7 +16027,7 @@
         </p:nvSpPr>
         <p:spPr>
           <a:xfrm>
-            <a:off x="4846320" y="3017520"/>
+            <a:off x="4846320" y="2880360"/>
             <a:ext cx="237744" cy="237744"/>
           </a:xfrm>
           <a:prstGeom prst="rect">
@@ -16066,8 +16066,8 @@
         </p:nvSpPr>
         <p:spPr>
           <a:xfrm>
-            <a:off x="5166360" y="2999232"/>
-            <a:ext cx="3602736" cy="329184"/>
+            <a:off x="5166360" y="2862072"/>
+            <a:ext cx="3602736" cy="310896"/>
           </a:xfrm>
           <a:prstGeom prst="rect">
             <a:avLst/>
@@ -16108,8 +16108,8 @@
         </p:nvSpPr>
         <p:spPr>
           <a:xfrm>
-            <a:off x="365760" y="3858768"/>
-            <a:ext cx="8412480" cy="237744"/>
+            <a:off x="365760" y="3712464"/>
+            <a:ext cx="8412480" cy="219456"/>
           </a:xfrm>
           <a:prstGeom prst="rect">
             <a:avLst/>
@@ -16128,8 +16128,8 @@
         </p:nvSpPr>
         <p:spPr>
           <a:xfrm>
-            <a:off x="502920" y="3858768"/>
-            <a:ext cx="4572000" cy="237744"/>
+            <a:off x="502920" y="3712464"/>
+            <a:ext cx="5943600" cy="219456"/>
           </a:xfrm>
           <a:prstGeom prst="rect">
             <a:avLst/>
@@ -16145,7 +16145,7 @@
               <a:buNone/>
             </a:pPr>
             <a:r>
-              <a:rPr lang="en-US" sz="1100" b="1" dirty="0">
+              <a:rPr lang="en-US" sz="1050" b="1" dirty="0">
                 <a:solidFill>
                   <a:srgbClr val="FFFFFF"/>
                 </a:solidFill>
@@ -16153,9 +16153,9 @@
                 <a:ea typeface="Calibri" pitchFamily="34" charset="-122"/>
                 <a:cs typeface="Calibri" pitchFamily="34" charset="-120"/>
               </a:rPr>
-              <a:t>大学訪問スケジュール</a:t>
-            </a:r>
-            <a:endParaRPr lang="en-US" sz="1100" dirty="0"/>
+              <a:t>大学訪問スケジュール（対象36校 / 9・10月入学留学生ターゲット）</a:t>
+            </a:r>
+            <a:endParaRPr lang="en-US" sz="1050" dirty="0"/>
           </a:p>
         </p:txBody>
       </p:sp>
@@ -16167,8 +16167,8 @@
         </p:nvSpPr>
         <p:spPr>
           <a:xfrm>
-            <a:off x="5120640" y="3858768"/>
-            <a:ext cx="3566160" cy="237744"/>
+            <a:off x="6492240" y="3712464"/>
+            <a:ext cx="2286000" cy="219456"/>
           </a:xfrm>
           <a:prstGeom prst="rect">
             <a:avLst/>
@@ -16192,7 +16192,7 @@
                 <a:ea typeface="Calibri" pitchFamily="34" charset="-122"/>
                 <a:cs typeface="Calibri" pitchFamily="34" charset="-120"/>
               </a:rPr>
-              <a:t>※アポ確定次第随時更新</a:t>
+              <a:t>※7月末までに全日程仮決め</a:t>
             </a:r>
             <a:endParaRPr lang="en-US" sz="900" dirty="0"/>
           </a:p>
@@ -16206,106 +16206,988 @@
         </p:nvSpPr>
         <p:spPr>
           <a:xfrm>
-            <a:off x="365760" y="4096512"/>
+            <a:off x="365760" y="3931920"/>
+            <a:ext cx="8412480" cy="182880"/>
+          </a:xfrm>
+          <a:prstGeom prst="rect">
+            <a:avLst/>
+          </a:prstGeom>
+          <a:solidFill>
+            <a:srgbClr val="CCCCCC"/>
+          </a:solidFill>
+          <a:ln/>
+        </p:spPr>
+      </p:sp>
+      <p:sp>
+        <p:nvSpPr>
+          <p:cNvPr id="60" name="Text 58"/>
+          <p:cNvSpPr/>
+          <p:nvPr/>
+        </p:nvSpPr>
+        <p:spPr>
+          <a:xfrm>
+            <a:off x="475488" y="3931920"/>
+            <a:ext cx="1188720" cy="182880"/>
+          </a:xfrm>
+          <a:prstGeom prst="rect">
+            <a:avLst/>
+          </a:prstGeom>
+          <a:noFill/>
+          <a:ln/>
+        </p:spPr>
+        <p:txBody>
+          <a:bodyPr wrap="square" rtlCol="0" anchor="ctr"/>
+          <a:lstStyle/>
+          <a:p>
+            <a:pPr indent="0" marL="0">
+              <a:buNone/>
+            </a:pPr>
+            <a:r>
+              <a:rPr lang="en-US" sz="900" b="1" dirty="0">
+                <a:solidFill>
+                  <a:srgbClr val="333333"/>
+                </a:solidFill>
+                <a:latin typeface="Calibri" pitchFamily="34" charset="0"/>
+                <a:ea typeface="Calibri" pitchFamily="34" charset="-122"/>
+                <a:cs typeface="Calibri" pitchFamily="34" charset="-120"/>
+              </a:rPr>
+              <a:t>時期</a:t>
+            </a:r>
+            <a:endParaRPr lang="en-US" sz="900" dirty="0"/>
+          </a:p>
+        </p:txBody>
+      </p:sp>
+      <p:sp>
+        <p:nvSpPr>
+          <p:cNvPr id="61" name="Text 59"/>
+          <p:cNvSpPr/>
+          <p:nvPr/>
+        </p:nvSpPr>
+        <p:spPr>
+          <a:xfrm>
+            <a:off x="1755648" y="3931920"/>
+            <a:ext cx="4937760" cy="182880"/>
+          </a:xfrm>
+          <a:prstGeom prst="rect">
+            <a:avLst/>
+          </a:prstGeom>
+          <a:noFill/>
+          <a:ln/>
+        </p:spPr>
+        <p:txBody>
+          <a:bodyPr wrap="square" rtlCol="0" anchor="ctr"/>
+          <a:lstStyle/>
+          <a:p>
+            <a:pPr indent="0" marL="0">
+              <a:buNone/>
+            </a:pPr>
+            <a:r>
+              <a:rPr lang="en-US" sz="900" b="1" dirty="0">
+                <a:solidFill>
+                  <a:srgbClr val="333333"/>
+                </a:solidFill>
+                <a:latin typeface="Calibri" pitchFamily="34" charset="0"/>
+                <a:ea typeface="Calibri" pitchFamily="34" charset="-122"/>
+                <a:cs typeface="Calibri" pitchFamily="34" charset="-120"/>
+              </a:rPr>
+              <a:t>訪問予定大学</a:t>
+            </a:r>
+            <a:endParaRPr lang="en-US" sz="900" dirty="0"/>
+          </a:p>
+        </p:txBody>
+      </p:sp>
+      <p:sp>
+        <p:nvSpPr>
+          <p:cNvPr id="62" name="Text 60"/>
+          <p:cNvSpPr/>
+          <p:nvPr/>
+        </p:nvSpPr>
+        <p:spPr>
+          <a:xfrm>
+            <a:off x="6748272" y="3931920"/>
+            <a:ext cx="640080" cy="182880"/>
+          </a:xfrm>
+          <a:prstGeom prst="rect">
+            <a:avLst/>
+          </a:prstGeom>
+          <a:noFill/>
+          <a:ln/>
+        </p:spPr>
+        <p:txBody>
+          <a:bodyPr wrap="square" rtlCol="0" anchor="ctr"/>
+          <a:lstStyle/>
+          <a:p>
+            <a:pPr algn="ctr" indent="0" marL="0">
+              <a:buNone/>
+            </a:pPr>
+            <a:r>
+              <a:rPr lang="en-US" sz="900" b="1" dirty="0">
+                <a:solidFill>
+                  <a:srgbClr val="333333"/>
+                </a:solidFill>
+                <a:latin typeface="Calibri" pitchFamily="34" charset="0"/>
+                <a:ea typeface="Calibri" pitchFamily="34" charset="-122"/>
+                <a:cs typeface="Calibri" pitchFamily="34" charset="-120"/>
+              </a:rPr>
+              <a:t>目標</a:t>
+            </a:r>
+            <a:endParaRPr lang="en-US" sz="900" dirty="0"/>
+          </a:p>
+        </p:txBody>
+      </p:sp>
+      <p:sp>
+        <p:nvSpPr>
+          <p:cNvPr id="63" name="Text 61"/>
+          <p:cNvSpPr/>
+          <p:nvPr/>
+        </p:nvSpPr>
+        <p:spPr>
+          <a:xfrm>
+            <a:off x="7443216" y="3931920"/>
+            <a:ext cx="1280160" cy="182880"/>
+          </a:xfrm>
+          <a:prstGeom prst="rect">
+            <a:avLst/>
+          </a:prstGeom>
+          <a:noFill/>
+          <a:ln/>
+        </p:spPr>
+        <p:txBody>
+          <a:bodyPr wrap="square" rtlCol="0" anchor="ctr"/>
+          <a:lstStyle/>
+          <a:p>
+            <a:pPr algn="ctr" indent="0" marL="0">
+              <a:buNone/>
+            </a:pPr>
+            <a:r>
+              <a:rPr lang="en-US" sz="900" b="1" dirty="0">
+                <a:solidFill>
+                  <a:srgbClr val="333333"/>
+                </a:solidFill>
+                <a:latin typeface="Calibri" pitchFamily="34" charset="0"/>
+                <a:ea typeface="Calibri" pitchFamily="34" charset="-122"/>
+                <a:cs typeface="Calibri" pitchFamily="34" charset="-120"/>
+              </a:rPr>
+              <a:t>状況</a:t>
+            </a:r>
+            <a:endParaRPr lang="en-US" sz="900" dirty="0"/>
+          </a:p>
+        </p:txBody>
+      </p:sp>
+      <p:sp>
+        <p:nvSpPr>
+          <p:cNvPr id="64" name="Shape 62"/>
+          <p:cNvSpPr/>
+          <p:nvPr/>
+        </p:nvSpPr>
+        <p:spPr>
+          <a:xfrm>
+            <a:off x="365760" y="4114800"/>
+            <a:ext cx="8412480" cy="182880"/>
+          </a:xfrm>
+          <a:prstGeom prst="rect">
+            <a:avLst/>
+          </a:prstGeom>
+          <a:solidFill>
+            <a:srgbClr val="FFFFFF"/>
+          </a:solidFill>
+          <a:ln/>
+        </p:spPr>
+      </p:sp>
+      <p:sp>
+        <p:nvSpPr>
+          <p:cNvPr id="65" name="Text 63"/>
+          <p:cNvSpPr/>
+          <p:nvPr/>
+        </p:nvSpPr>
+        <p:spPr>
+          <a:xfrm>
+            <a:off x="475488" y="4114800"/>
+            <a:ext cx="1188720" cy="182880"/>
+          </a:xfrm>
+          <a:prstGeom prst="rect">
+            <a:avLst/>
+          </a:prstGeom>
+          <a:noFill/>
+          <a:ln/>
+        </p:spPr>
+        <p:txBody>
+          <a:bodyPr wrap="square" rtlCol="0" anchor="ctr"/>
+          <a:lstStyle/>
+          <a:p>
+            <a:pPr indent="0" marL="0">
+              <a:buNone/>
+            </a:pPr>
+            <a:r>
+              <a:rPr lang="en-US" sz="950" b="1" dirty="0">
+                <a:solidFill>
+                  <a:srgbClr val="333333"/>
+                </a:solidFill>
+                <a:latin typeface="Calibri" pitchFamily="34" charset="0"/>
+                <a:ea typeface="Calibri" pitchFamily="34" charset="-122"/>
+                <a:cs typeface="Calibri" pitchFamily="34" charset="-120"/>
+              </a:rPr>
+              <a:t>7月後半</a:t>
+            </a:r>
+            <a:endParaRPr lang="en-US" sz="950" dirty="0"/>
+          </a:p>
+        </p:txBody>
+      </p:sp>
+      <p:sp>
+        <p:nvSpPr>
+          <p:cNvPr id="66" name="Text 64"/>
+          <p:cNvSpPr/>
+          <p:nvPr/>
+        </p:nvSpPr>
+        <p:spPr>
+          <a:xfrm>
+            <a:off x="1755648" y="4114800"/>
+            <a:ext cx="4919472" cy="182880"/>
+          </a:xfrm>
+          <a:prstGeom prst="rect">
+            <a:avLst/>
+          </a:prstGeom>
+          <a:noFill/>
+          <a:ln/>
+        </p:spPr>
+        <p:txBody>
+          <a:bodyPr wrap="square" rtlCol="0" anchor="ctr"/>
+          <a:lstStyle/>
+          <a:p>
+            <a:pPr indent="0" marL="0">
+              <a:buNone/>
+            </a:pPr>
+            <a:r>
+              <a:rPr lang="en-US" sz="950" dirty="0">
+                <a:solidFill>
+                  <a:srgbClr val="333333"/>
+                </a:solidFill>
+                <a:latin typeface="Calibri" pitchFamily="34" charset="0"/>
+                <a:ea typeface="Calibri" pitchFamily="34" charset="-122"/>
+                <a:cs typeface="Calibri" pitchFamily="34" charset="-120"/>
+              </a:rPr>
+              <a:t>大東文化大・東洋大・立教大（7/27確定）＋追加校調整中</a:t>
+            </a:r>
+            <a:endParaRPr lang="en-US" sz="950" dirty="0"/>
+          </a:p>
+        </p:txBody>
+      </p:sp>
+      <p:sp>
+        <p:nvSpPr>
+          <p:cNvPr id="67" name="Text 65"/>
+          <p:cNvSpPr/>
+          <p:nvPr/>
+        </p:nvSpPr>
+        <p:spPr>
+          <a:xfrm>
+            <a:off x="6748272" y="4114800"/>
+            <a:ext cx="640080" cy="182880"/>
+          </a:xfrm>
+          <a:prstGeom prst="rect">
+            <a:avLst/>
+          </a:prstGeom>
+          <a:noFill/>
+          <a:ln/>
+        </p:spPr>
+        <p:txBody>
+          <a:bodyPr wrap="square" rtlCol="0" anchor="ctr"/>
+          <a:lstStyle/>
+          <a:p>
+            <a:pPr algn="ctr" indent="0" marL="0">
+              <a:buNone/>
+            </a:pPr>
+            <a:r>
+              <a:rPr lang="en-US" sz="900" b="1" dirty="0">
+                <a:solidFill>
+                  <a:srgbClr val="333333"/>
+                </a:solidFill>
+                <a:latin typeface="Calibri" pitchFamily="34" charset="0"/>
+                <a:ea typeface="Calibri" pitchFamily="34" charset="-122"/>
+                <a:cs typeface="Calibri" pitchFamily="34" charset="-120"/>
+              </a:rPr>
+              <a:t>〜5校</a:t>
+            </a:r>
+            <a:endParaRPr lang="en-US" sz="900" dirty="0"/>
+          </a:p>
+        </p:txBody>
+      </p:sp>
+      <p:sp>
+        <p:nvSpPr>
+          <p:cNvPr id="68" name="Shape 66"/>
+          <p:cNvSpPr/>
+          <p:nvPr/>
+        </p:nvSpPr>
+        <p:spPr>
+          <a:xfrm>
+            <a:off x="7443216" y="4114800"/>
+            <a:ext cx="1298448" cy="182880"/>
+          </a:xfrm>
+          <a:prstGeom prst="rect">
+            <a:avLst/>
+          </a:prstGeom>
+          <a:solidFill>
+            <a:srgbClr val="156818"/>
+          </a:solidFill>
+          <a:ln/>
+        </p:spPr>
+      </p:sp>
+      <p:sp>
+        <p:nvSpPr>
+          <p:cNvPr id="69" name="Text 67"/>
+          <p:cNvSpPr/>
+          <p:nvPr/>
+        </p:nvSpPr>
+        <p:spPr>
+          <a:xfrm>
+            <a:off x="7443216" y="4114800"/>
+            <a:ext cx="1298448" cy="182880"/>
+          </a:xfrm>
+          <a:prstGeom prst="rect">
+            <a:avLst/>
+          </a:prstGeom>
+          <a:noFill/>
+          <a:ln/>
+        </p:spPr>
+        <p:txBody>
+          <a:bodyPr wrap="square" rtlCol="0" anchor="ctr"/>
+          <a:lstStyle/>
+          <a:p>
+            <a:pPr algn="ctr" indent="0" marL="0">
+              <a:buNone/>
+            </a:pPr>
+            <a:r>
+              <a:rPr lang="en-US" sz="850" b="1" dirty="0">
+                <a:solidFill>
+                  <a:srgbClr val="FFFFFF"/>
+                </a:solidFill>
+                <a:latin typeface="Calibri" pitchFamily="34" charset="0"/>
+                <a:ea typeface="Calibri" pitchFamily="34" charset="-122"/>
+                <a:cs typeface="Calibri" pitchFamily="34" charset="-120"/>
+              </a:rPr>
+              <a:t>一部確定</a:t>
+            </a:r>
+            <a:endParaRPr lang="en-US" sz="850" dirty="0"/>
+          </a:p>
+        </p:txBody>
+      </p:sp>
+      <p:sp>
+        <p:nvSpPr>
+          <p:cNvPr id="70" name="Shape 68"/>
+          <p:cNvSpPr/>
+          <p:nvPr/>
+        </p:nvSpPr>
+        <p:spPr>
+          <a:xfrm>
+            <a:off x="365760" y="4297680"/>
+            <a:ext cx="8412480" cy="182880"/>
+          </a:xfrm>
+          <a:prstGeom prst="rect">
+            <a:avLst/>
+          </a:prstGeom>
+          <a:solidFill>
+            <a:srgbClr val="F3F3F3"/>
+          </a:solidFill>
+          <a:ln/>
+        </p:spPr>
+      </p:sp>
+      <p:sp>
+        <p:nvSpPr>
+          <p:cNvPr id="71" name="Text 69"/>
+          <p:cNvSpPr/>
+          <p:nvPr/>
+        </p:nvSpPr>
+        <p:spPr>
+          <a:xfrm>
+            <a:off x="475488" y="4297680"/>
+            <a:ext cx="1188720" cy="182880"/>
+          </a:xfrm>
+          <a:prstGeom prst="rect">
+            <a:avLst/>
+          </a:prstGeom>
+          <a:noFill/>
+          <a:ln/>
+        </p:spPr>
+        <p:txBody>
+          <a:bodyPr wrap="square" rtlCol="0" anchor="ctr"/>
+          <a:lstStyle/>
+          <a:p>
+            <a:pPr indent="0" marL="0">
+              <a:buNone/>
+            </a:pPr>
+            <a:r>
+              <a:rPr lang="en-US" sz="950" dirty="0">
+                <a:solidFill>
+                  <a:srgbClr val="333333"/>
+                </a:solidFill>
+                <a:latin typeface="Calibri" pitchFamily="34" charset="0"/>
+                <a:ea typeface="Calibri" pitchFamily="34" charset="-122"/>
+                <a:cs typeface="Calibri" pitchFamily="34" charset="-120"/>
+              </a:rPr>
+              <a:t>8月</a:t>
+            </a:r>
+            <a:endParaRPr lang="en-US" sz="950" dirty="0"/>
+          </a:p>
+        </p:txBody>
+      </p:sp>
+      <p:sp>
+        <p:nvSpPr>
+          <p:cNvPr id="72" name="Text 70"/>
+          <p:cNvSpPr/>
+          <p:nvPr/>
+        </p:nvSpPr>
+        <p:spPr>
+          <a:xfrm>
+            <a:off x="1755648" y="4297680"/>
+            <a:ext cx="4919472" cy="182880"/>
+          </a:xfrm>
+          <a:prstGeom prst="rect">
+            <a:avLst/>
+          </a:prstGeom>
+          <a:noFill/>
+          <a:ln/>
+        </p:spPr>
+        <p:txBody>
+          <a:bodyPr wrap="square" rtlCol="0" anchor="ctr"/>
+          <a:lstStyle/>
+          <a:p>
+            <a:pPr indent="0" marL="0">
+              <a:buNone/>
+            </a:pPr>
+            <a:r>
+              <a:rPr lang="en-US" sz="950" dirty="0">
+                <a:solidFill>
+                  <a:srgbClr val="333333"/>
+                </a:solidFill>
+                <a:latin typeface="Calibri" pitchFamily="34" charset="0"/>
+                <a:ea typeface="Calibri" pitchFamily="34" charset="-122"/>
+                <a:cs typeface="Calibri" pitchFamily="34" charset="-120"/>
+              </a:rPr>
+              <a:t>調整中</a:t>
+            </a:r>
+            <a:endParaRPr lang="en-US" sz="950" dirty="0"/>
+          </a:p>
+        </p:txBody>
+      </p:sp>
+      <p:sp>
+        <p:nvSpPr>
+          <p:cNvPr id="73" name="Text 71"/>
+          <p:cNvSpPr/>
+          <p:nvPr/>
+        </p:nvSpPr>
+        <p:spPr>
+          <a:xfrm>
+            <a:off x="6748272" y="4297680"/>
+            <a:ext cx="640080" cy="182880"/>
+          </a:xfrm>
+          <a:prstGeom prst="rect">
+            <a:avLst/>
+          </a:prstGeom>
+          <a:noFill/>
+          <a:ln/>
+        </p:spPr>
+        <p:txBody>
+          <a:bodyPr wrap="square" rtlCol="0" anchor="ctr"/>
+          <a:lstStyle/>
+          <a:p>
+            <a:pPr algn="ctr" indent="0" marL="0">
+              <a:buNone/>
+            </a:pPr>
+            <a:r>
+              <a:rPr lang="en-US" sz="900" b="1" dirty="0">
+                <a:solidFill>
+                  <a:srgbClr val="333333"/>
+                </a:solidFill>
+                <a:latin typeface="Calibri" pitchFamily="34" charset="0"/>
+                <a:ea typeface="Calibri" pitchFamily="34" charset="-122"/>
+                <a:cs typeface="Calibri" pitchFamily="34" charset="-120"/>
+              </a:rPr>
+              <a:t>〜12校</a:t>
+            </a:r>
+            <a:endParaRPr lang="en-US" sz="900" dirty="0"/>
+          </a:p>
+        </p:txBody>
+      </p:sp>
+      <p:sp>
+        <p:nvSpPr>
+          <p:cNvPr id="74" name="Shape 72"/>
+          <p:cNvSpPr/>
+          <p:nvPr/>
+        </p:nvSpPr>
+        <p:spPr>
+          <a:xfrm>
+            <a:off x="7443216" y="4297680"/>
+            <a:ext cx="1298448" cy="182880"/>
+          </a:xfrm>
+          <a:prstGeom prst="rect">
+            <a:avLst/>
+          </a:prstGeom>
+          <a:solidFill>
+            <a:srgbClr val="E65100"/>
+          </a:solidFill>
+          <a:ln/>
+        </p:spPr>
+      </p:sp>
+      <p:sp>
+        <p:nvSpPr>
+          <p:cNvPr id="75" name="Text 73"/>
+          <p:cNvSpPr/>
+          <p:nvPr/>
+        </p:nvSpPr>
+        <p:spPr>
+          <a:xfrm>
+            <a:off x="7443216" y="4297680"/>
+            <a:ext cx="1298448" cy="182880"/>
+          </a:xfrm>
+          <a:prstGeom prst="rect">
+            <a:avLst/>
+          </a:prstGeom>
+          <a:noFill/>
+          <a:ln/>
+        </p:spPr>
+        <p:txBody>
+          <a:bodyPr wrap="square" rtlCol="0" anchor="ctr"/>
+          <a:lstStyle/>
+          <a:p>
+            <a:pPr algn="ctr" indent="0" marL="0">
+              <a:buNone/>
+            </a:pPr>
+            <a:r>
+              <a:rPr lang="en-US" sz="850" b="1" dirty="0">
+                <a:solidFill>
+                  <a:srgbClr val="FFFFFF"/>
+                </a:solidFill>
+                <a:latin typeface="Calibri" pitchFamily="34" charset="0"/>
+                <a:ea typeface="Calibri" pitchFamily="34" charset="-122"/>
+                <a:cs typeface="Calibri" pitchFamily="34" charset="-120"/>
+              </a:rPr>
+              <a:t>アポ取得中</a:t>
+            </a:r>
+            <a:endParaRPr lang="en-US" sz="850" dirty="0"/>
+          </a:p>
+        </p:txBody>
+      </p:sp>
+      <p:sp>
+        <p:nvSpPr>
+          <p:cNvPr id="76" name="Shape 74"/>
+          <p:cNvSpPr/>
+          <p:nvPr/>
+        </p:nvSpPr>
+        <p:spPr>
+          <a:xfrm>
+            <a:off x="365760" y="4480560"/>
+            <a:ext cx="8412480" cy="182880"/>
+          </a:xfrm>
+          <a:prstGeom prst="rect">
+            <a:avLst/>
+          </a:prstGeom>
+          <a:solidFill>
+            <a:srgbClr val="FFFFFF"/>
+          </a:solidFill>
+          <a:ln/>
+        </p:spPr>
+      </p:sp>
+      <p:sp>
+        <p:nvSpPr>
+          <p:cNvPr id="77" name="Text 75"/>
+          <p:cNvSpPr/>
+          <p:nvPr/>
+        </p:nvSpPr>
+        <p:spPr>
+          <a:xfrm>
+            <a:off x="475488" y="4480560"/>
+            <a:ext cx="1188720" cy="182880"/>
+          </a:xfrm>
+          <a:prstGeom prst="rect">
+            <a:avLst/>
+          </a:prstGeom>
+          <a:noFill/>
+          <a:ln/>
+        </p:spPr>
+        <p:txBody>
+          <a:bodyPr wrap="square" rtlCol="0" anchor="ctr"/>
+          <a:lstStyle/>
+          <a:p>
+            <a:pPr indent="0" marL="0">
+              <a:buNone/>
+            </a:pPr>
+            <a:r>
+              <a:rPr lang="en-US" sz="950" dirty="0">
+                <a:solidFill>
+                  <a:srgbClr val="333333"/>
+                </a:solidFill>
+                <a:latin typeface="Calibri" pitchFamily="34" charset="0"/>
+                <a:ea typeface="Calibri" pitchFamily="34" charset="-122"/>
+                <a:cs typeface="Calibri" pitchFamily="34" charset="-120"/>
+              </a:rPr>
+              <a:t>9月</a:t>
+            </a:r>
+            <a:endParaRPr lang="en-US" sz="950" dirty="0"/>
+          </a:p>
+        </p:txBody>
+      </p:sp>
+      <p:sp>
+        <p:nvSpPr>
+          <p:cNvPr id="78" name="Text 76"/>
+          <p:cNvSpPr/>
+          <p:nvPr/>
+        </p:nvSpPr>
+        <p:spPr>
+          <a:xfrm>
+            <a:off x="1755648" y="4480560"/>
+            <a:ext cx="4919472" cy="182880"/>
+          </a:xfrm>
+          <a:prstGeom prst="rect">
+            <a:avLst/>
+          </a:prstGeom>
+          <a:noFill/>
+          <a:ln/>
+        </p:spPr>
+        <p:txBody>
+          <a:bodyPr wrap="square" rtlCol="0" anchor="ctr"/>
+          <a:lstStyle/>
+          <a:p>
+            <a:pPr indent="0" marL="0">
+              <a:buNone/>
+            </a:pPr>
+            <a:r>
+              <a:rPr lang="en-US" sz="950" dirty="0">
+                <a:solidFill>
+                  <a:srgbClr val="333333"/>
+                </a:solidFill>
+                <a:latin typeface="Calibri" pitchFamily="34" charset="0"/>
+                <a:ea typeface="Calibri" pitchFamily="34" charset="-122"/>
+                <a:cs typeface="Calibri" pitchFamily="34" charset="-120"/>
+              </a:rPr>
+              <a:t>調整中（9月入学前にアプローチ）</a:t>
+            </a:r>
+            <a:endParaRPr lang="en-US" sz="950" dirty="0"/>
+          </a:p>
+        </p:txBody>
+      </p:sp>
+      <p:sp>
+        <p:nvSpPr>
+          <p:cNvPr id="79" name="Text 77"/>
+          <p:cNvSpPr/>
+          <p:nvPr/>
+        </p:nvSpPr>
+        <p:spPr>
+          <a:xfrm>
+            <a:off x="6748272" y="4480560"/>
+            <a:ext cx="640080" cy="182880"/>
+          </a:xfrm>
+          <a:prstGeom prst="rect">
+            <a:avLst/>
+          </a:prstGeom>
+          <a:noFill/>
+          <a:ln/>
+        </p:spPr>
+        <p:txBody>
+          <a:bodyPr wrap="square" rtlCol="0" anchor="ctr"/>
+          <a:lstStyle/>
+          <a:p>
+            <a:pPr algn="ctr" indent="0" marL="0">
+              <a:buNone/>
+            </a:pPr>
+            <a:r>
+              <a:rPr lang="en-US" sz="900" b="1" dirty="0">
+                <a:solidFill>
+                  <a:srgbClr val="333333"/>
+                </a:solidFill>
+                <a:latin typeface="Calibri" pitchFamily="34" charset="0"/>
+                <a:ea typeface="Calibri" pitchFamily="34" charset="-122"/>
+                <a:cs typeface="Calibri" pitchFamily="34" charset="-120"/>
+              </a:rPr>
+              <a:t>〜12校</a:t>
+            </a:r>
+            <a:endParaRPr lang="en-US" sz="900" dirty="0"/>
+          </a:p>
+        </p:txBody>
+      </p:sp>
+      <p:sp>
+        <p:nvSpPr>
+          <p:cNvPr id="80" name="Shape 78"/>
+          <p:cNvSpPr/>
+          <p:nvPr/>
+        </p:nvSpPr>
+        <p:spPr>
+          <a:xfrm>
+            <a:off x="7443216" y="4480560"/>
+            <a:ext cx="1298448" cy="182880"/>
+          </a:xfrm>
+          <a:prstGeom prst="rect">
+            <a:avLst/>
+          </a:prstGeom>
+          <a:solidFill>
+            <a:srgbClr val="999999"/>
+          </a:solidFill>
+          <a:ln/>
+        </p:spPr>
+      </p:sp>
+      <p:sp>
+        <p:nvSpPr>
+          <p:cNvPr id="81" name="Text 79"/>
+          <p:cNvSpPr/>
+          <p:nvPr/>
+        </p:nvSpPr>
+        <p:spPr>
+          <a:xfrm>
+            <a:off x="7443216" y="4480560"/>
+            <a:ext cx="1298448" cy="182880"/>
+          </a:xfrm>
+          <a:prstGeom prst="rect">
+            <a:avLst/>
+          </a:prstGeom>
+          <a:noFill/>
+          <a:ln/>
+        </p:spPr>
+        <p:txBody>
+          <a:bodyPr wrap="square" rtlCol="0" anchor="ctr"/>
+          <a:lstStyle/>
+          <a:p>
+            <a:pPr algn="ctr" indent="0" marL="0">
+              <a:buNone/>
+            </a:pPr>
+            <a:r>
+              <a:rPr lang="en-US" sz="850" b="1" dirty="0">
+                <a:solidFill>
+                  <a:srgbClr val="FFFFFF"/>
+                </a:solidFill>
+                <a:latin typeface="Calibri" pitchFamily="34" charset="0"/>
+                <a:ea typeface="Calibri" pitchFamily="34" charset="-122"/>
+                <a:cs typeface="Calibri" pitchFamily="34" charset="-120"/>
+              </a:rPr>
+              <a:t>未定</a:t>
+            </a:r>
+            <a:endParaRPr lang="en-US" sz="850" dirty="0"/>
+          </a:p>
+        </p:txBody>
+      </p:sp>
+      <p:sp>
+        <p:nvSpPr>
+          <p:cNvPr id="82" name="Shape 80"/>
+          <p:cNvSpPr/>
+          <p:nvPr/>
+        </p:nvSpPr>
+        <p:spPr>
+          <a:xfrm>
+            <a:off x="365760" y="4663440"/>
+            <a:ext cx="8412480" cy="182880"/>
+          </a:xfrm>
+          <a:prstGeom prst="rect">
+            <a:avLst/>
+          </a:prstGeom>
+          <a:solidFill>
+            <a:srgbClr val="F3F3F3"/>
+          </a:solidFill>
+          <a:ln/>
+        </p:spPr>
+      </p:sp>
+      <p:sp>
+        <p:nvSpPr>
+          <p:cNvPr id="83" name="Text 81"/>
+          <p:cNvSpPr/>
+          <p:nvPr/>
+        </p:nvSpPr>
+        <p:spPr>
+          <a:xfrm>
+            <a:off x="475488" y="4663440"/>
+            <a:ext cx="1188720" cy="182880"/>
+          </a:xfrm>
+          <a:prstGeom prst="rect">
+            <a:avLst/>
+          </a:prstGeom>
+          <a:noFill/>
+          <a:ln/>
+        </p:spPr>
+        <p:txBody>
+          <a:bodyPr wrap="square" rtlCol="0" anchor="ctr"/>
+          <a:lstStyle/>
+          <a:p>
+            <a:pPr indent="0" marL="0">
+              <a:buNone/>
+            </a:pPr>
+            <a:r>
+              <a:rPr lang="en-US" sz="950" dirty="0">
+                <a:solidFill>
+                  <a:srgbClr val="333333"/>
+                </a:solidFill>
+                <a:latin typeface="Calibri" pitchFamily="34" charset="0"/>
+                <a:ea typeface="Calibri" pitchFamily="34" charset="-122"/>
+                <a:cs typeface="Calibri" pitchFamily="34" charset="-120"/>
+              </a:rPr>
+              <a:t>10月</a:t>
+            </a:r>
+            <a:endParaRPr lang="en-US" sz="950" dirty="0"/>
+          </a:p>
+        </p:txBody>
+      </p:sp>
+      <p:sp>
+        <p:nvSpPr>
+          <p:cNvPr id="84" name="Text 82"/>
+          <p:cNvSpPr/>
+          <p:nvPr/>
+        </p:nvSpPr>
+        <p:spPr>
+          <a:xfrm>
+            <a:off x="1755648" y="4663440"/>
+            <a:ext cx="4919472" cy="182880"/>
+          </a:xfrm>
+          <a:prstGeom prst="rect">
+            <a:avLst/>
+          </a:prstGeom>
+          <a:noFill/>
+          <a:ln/>
+        </p:spPr>
+        <p:txBody>
+          <a:bodyPr wrap="square" rtlCol="0" anchor="ctr"/>
+          <a:lstStyle/>
+          <a:p>
+            <a:pPr indent="0" marL="0">
+              <a:buNone/>
+            </a:pPr>
+            <a:r>
+              <a:rPr lang="en-US" sz="950" dirty="0">
+                <a:solidFill>
+                  <a:srgbClr val="333333"/>
+                </a:solidFill>
+                <a:latin typeface="Calibri" pitchFamily="34" charset="0"/>
+                <a:ea typeface="Calibri" pitchFamily="34" charset="-122"/>
+                <a:cs typeface="Calibri" pitchFamily="34" charset="-120"/>
+              </a:rPr>
+              <a:t>調整中（10月入学前にアプローチ）</a:t>
+            </a:r>
+            <a:endParaRPr lang="en-US" sz="950" dirty="0"/>
+          </a:p>
+        </p:txBody>
+      </p:sp>
+      <p:sp>
+        <p:nvSpPr>
+          <p:cNvPr id="85" name="Text 83"/>
+          <p:cNvSpPr/>
+          <p:nvPr/>
+        </p:nvSpPr>
+        <p:spPr>
+          <a:xfrm>
+            <a:off x="6748272" y="4663440"/>
+            <a:ext cx="640080" cy="182880"/>
+          </a:xfrm>
+          <a:prstGeom prst="rect">
+            <a:avLst/>
+          </a:prstGeom>
+          <a:noFill/>
+          <a:ln/>
+        </p:spPr>
+        <p:txBody>
+          <a:bodyPr wrap="square" rtlCol="0" anchor="ctr"/>
+          <a:lstStyle/>
+          <a:p>
+            <a:pPr algn="ctr" indent="0" marL="0">
+              <a:buNone/>
+            </a:pPr>
+            <a:r>
+              <a:rPr lang="en-US" sz="900" b="1" dirty="0">
+                <a:solidFill>
+                  <a:srgbClr val="333333"/>
+                </a:solidFill>
+                <a:latin typeface="Calibri" pitchFamily="34" charset="0"/>
+                <a:ea typeface="Calibri" pitchFamily="34" charset="-122"/>
+                <a:cs typeface="Calibri" pitchFamily="34" charset="-120"/>
+              </a:rPr>
+              <a:t>〜7校</a:t>
+            </a:r>
+            <a:endParaRPr lang="en-US" sz="900" dirty="0"/>
+          </a:p>
+        </p:txBody>
+      </p:sp>
+      <p:sp>
+        <p:nvSpPr>
+          <p:cNvPr id="86" name="Shape 84"/>
+          <p:cNvSpPr/>
+          <p:nvPr/>
+        </p:nvSpPr>
+        <p:spPr>
+          <a:xfrm>
+            <a:off x="7443216" y="4663440"/>
+            <a:ext cx="1298448" cy="182880"/>
+          </a:xfrm>
+          <a:prstGeom prst="rect">
+            <a:avLst/>
+          </a:prstGeom>
+          <a:solidFill>
+            <a:srgbClr val="999999"/>
+          </a:solidFill>
+          <a:ln/>
+        </p:spPr>
+      </p:sp>
+      <p:sp>
+        <p:nvSpPr>
+          <p:cNvPr id="87" name="Text 85"/>
+          <p:cNvSpPr/>
+          <p:nvPr/>
+        </p:nvSpPr>
+        <p:spPr>
+          <a:xfrm>
+            <a:off x="7443216" y="4663440"/>
+            <a:ext cx="1298448" cy="182880"/>
+          </a:xfrm>
+          <a:prstGeom prst="rect">
+            <a:avLst/>
+          </a:prstGeom>
+          <a:noFill/>
+          <a:ln/>
+        </p:spPr>
+        <p:txBody>
+          <a:bodyPr wrap="square" rtlCol="0" anchor="ctr"/>
+          <a:lstStyle/>
+          <a:p>
+            <a:pPr algn="ctr" indent="0" marL="0">
+              <a:buNone/>
+            </a:pPr>
+            <a:r>
+              <a:rPr lang="en-US" sz="850" b="1" dirty="0">
+                <a:solidFill>
+                  <a:srgbClr val="FFFFFF"/>
+                </a:solidFill>
+                <a:latin typeface="Calibri" pitchFamily="34" charset="0"/>
+                <a:ea typeface="Calibri" pitchFamily="34" charset="-122"/>
+                <a:cs typeface="Calibri" pitchFamily="34" charset="-120"/>
+              </a:rPr>
+              <a:t>未定</a:t>
+            </a:r>
+            <a:endParaRPr lang="en-US" sz="850" dirty="0"/>
+          </a:p>
+        </p:txBody>
+      </p:sp>
+      <p:sp>
+        <p:nvSpPr>
+          <p:cNvPr id="88" name="Shape 86"/>
+          <p:cNvSpPr/>
+          <p:nvPr/>
+        </p:nvSpPr>
+        <p:spPr>
+          <a:xfrm>
+            <a:off x="365760" y="4864608"/>
             <a:ext cx="8412480" cy="201168"/>
           </a:xfrm>
           <a:prstGeom prst="rect">
             <a:avLst/>
           </a:prstGeom>
           <a:solidFill>
-            <a:srgbClr val="CCCCCC"/>
-          </a:solidFill>
-          <a:ln/>
-        </p:spPr>
-      </p:sp>
-      <p:sp>
-        <p:nvSpPr>
-          <p:cNvPr id="60" name="Text 58"/>
-          <p:cNvSpPr/>
-          <p:nvPr/>
-        </p:nvSpPr>
-        <p:spPr>
-          <a:xfrm>
-            <a:off x="475488" y="4096512"/>
-            <a:ext cx="1280160" cy="201168"/>
-          </a:xfrm>
-          <a:prstGeom prst="rect">
-            <a:avLst/>
-          </a:prstGeom>
-          <a:noFill/>
-          <a:ln/>
-        </p:spPr>
-        <p:txBody>
-          <a:bodyPr wrap="square" rtlCol="0" anchor="ctr"/>
-          <a:lstStyle/>
-          <a:p>
-            <a:pPr indent="0" marL="0">
-              <a:buNone/>
-            </a:pPr>
-            <a:r>
-              <a:rPr lang="en-US" sz="950" b="1" dirty="0">
-                <a:solidFill>
-                  <a:srgbClr val="333333"/>
-                </a:solidFill>
-                <a:latin typeface="Calibri" pitchFamily="34" charset="0"/>
-                <a:ea typeface="Calibri" pitchFamily="34" charset="-122"/>
-                <a:cs typeface="Calibri" pitchFamily="34" charset="-120"/>
-              </a:rPr>
-              <a:t>日付</a:t>
-            </a:r>
-            <a:endParaRPr lang="en-US" sz="950" dirty="0"/>
-          </a:p>
-        </p:txBody>
-      </p:sp>
-      <p:sp>
-        <p:nvSpPr>
-          <p:cNvPr id="61" name="Text 59"/>
-          <p:cNvSpPr/>
-          <p:nvPr/>
-        </p:nvSpPr>
-        <p:spPr>
-          <a:xfrm>
-            <a:off x="1847088" y="4096512"/>
-            <a:ext cx="4937760" cy="201168"/>
-          </a:xfrm>
-          <a:prstGeom prst="rect">
-            <a:avLst/>
-          </a:prstGeom>
-          <a:noFill/>
-          <a:ln/>
-        </p:spPr>
-        <p:txBody>
-          <a:bodyPr wrap="square" rtlCol="0" anchor="ctr"/>
-          <a:lstStyle/>
-          <a:p>
-            <a:pPr indent="0" marL="0">
-              <a:buNone/>
-            </a:pPr>
-            <a:r>
-              <a:rPr lang="en-US" sz="950" b="1" dirty="0">
-                <a:solidFill>
-                  <a:srgbClr val="333333"/>
-                </a:solidFill>
-                <a:latin typeface="Calibri" pitchFamily="34" charset="0"/>
-                <a:ea typeface="Calibri" pitchFamily="34" charset="-122"/>
-                <a:cs typeface="Calibri" pitchFamily="34" charset="-120"/>
-              </a:rPr>
-              <a:t>訪問大学</a:t>
-            </a:r>
-            <a:endParaRPr lang="en-US" sz="950" dirty="0"/>
-          </a:p>
-        </p:txBody>
-      </p:sp>
-      <p:sp>
-        <p:nvSpPr>
-          <p:cNvPr id="62" name="Text 60"/>
-          <p:cNvSpPr/>
-          <p:nvPr/>
-        </p:nvSpPr>
-        <p:spPr>
-          <a:xfrm>
-            <a:off x="6784848" y="4096512"/>
-            <a:ext cx="1828800" cy="201168"/>
+            <a:srgbClr val="DD7E6B"/>
+          </a:solidFill>
+          <a:ln/>
+        </p:spPr>
+      </p:sp>
+      <p:sp>
+        <p:nvSpPr>
+          <p:cNvPr id="89" name="Text 87"/>
+          <p:cNvSpPr/>
+          <p:nvPr/>
+        </p:nvSpPr>
+        <p:spPr>
+          <a:xfrm>
+            <a:off x="365760" y="4864608"/>
+            <a:ext cx="8412480" cy="201168"/>
           </a:xfrm>
           <a:prstGeom prst="rect">
             <a:avLst/>
@@ -16321,164 +17203,7 @@
               <a:buNone/>
             </a:pPr>
             <a:r>
-              <a:rPr lang="en-US" sz="950" b="1" dirty="0">
-                <a:solidFill>
-                  <a:srgbClr val="333333"/>
-                </a:solidFill>
-                <a:latin typeface="Calibri" pitchFamily="34" charset="0"/>
-                <a:ea typeface="Calibri" pitchFamily="34" charset="-122"/>
-                <a:cs typeface="Calibri" pitchFamily="34" charset="-120"/>
-              </a:rPr>
-              <a:t>ステータス</a:t>
-            </a:r>
-            <a:endParaRPr lang="en-US" sz="950" dirty="0"/>
-          </a:p>
-        </p:txBody>
-      </p:sp>
-      <p:sp>
-        <p:nvSpPr>
-          <p:cNvPr id="63" name="Shape 61"/>
-          <p:cNvSpPr/>
-          <p:nvPr/>
-        </p:nvSpPr>
-        <p:spPr>
-          <a:xfrm>
-            <a:off x="365760" y="4297680"/>
-            <a:ext cx="8412480" cy="201168"/>
-          </a:xfrm>
-          <a:prstGeom prst="rect">
-            <a:avLst/>
-          </a:prstGeom>
-          <a:solidFill>
-            <a:srgbClr val="FFFFFF"/>
-          </a:solidFill>
-          <a:ln/>
-        </p:spPr>
-      </p:sp>
-      <p:sp>
-        <p:nvSpPr>
-          <p:cNvPr id="64" name="Text 62"/>
-          <p:cNvSpPr/>
-          <p:nvPr/>
-        </p:nvSpPr>
-        <p:spPr>
-          <a:xfrm>
-            <a:off x="475488" y="4297680"/>
-            <a:ext cx="1280160" cy="201168"/>
-          </a:xfrm>
-          <a:prstGeom prst="rect">
-            <a:avLst/>
-          </a:prstGeom>
-          <a:noFill/>
-          <a:ln/>
-        </p:spPr>
-        <p:txBody>
-          <a:bodyPr wrap="square" rtlCol="0" anchor="ctr"/>
-          <a:lstStyle/>
-          <a:p>
-            <a:pPr indent="0" marL="0">
-              <a:buNone/>
-            </a:pPr>
-            <a:r>
-              <a:rPr lang="en-US" sz="950" b="1" dirty="0">
-                <a:solidFill>
-                  <a:srgbClr val="333333"/>
-                </a:solidFill>
-                <a:latin typeface="Calibri" pitchFamily="34" charset="0"/>
-                <a:ea typeface="Calibri" pitchFamily="34" charset="-122"/>
-                <a:cs typeface="Calibri" pitchFamily="34" charset="-120"/>
-              </a:rPr>
-              <a:t>7/27（月）</a:t>
-            </a:r>
-            <a:endParaRPr lang="en-US" sz="950" dirty="0"/>
-          </a:p>
-        </p:txBody>
-      </p:sp>
-      <p:sp>
-        <p:nvSpPr>
-          <p:cNvPr id="65" name="Text 63"/>
-          <p:cNvSpPr/>
-          <p:nvPr/>
-        </p:nvSpPr>
-        <p:spPr>
-          <a:xfrm>
-            <a:off x="1847088" y="4297680"/>
-            <a:ext cx="4846320" cy="201168"/>
-          </a:xfrm>
-          <a:prstGeom prst="rect">
-            <a:avLst/>
-          </a:prstGeom>
-          <a:noFill/>
-          <a:ln/>
-        </p:spPr>
-        <p:txBody>
-          <a:bodyPr wrap="square" rtlCol="0" anchor="ctr"/>
-          <a:lstStyle/>
-          <a:p>
-            <a:pPr indent="0" marL="0">
-              <a:buNone/>
-            </a:pPr>
-            <a:r>
-              <a:rPr lang="en-US" sz="950" dirty="0">
-                <a:solidFill>
-                  <a:srgbClr val="333333"/>
-                </a:solidFill>
-                <a:latin typeface="Calibri" pitchFamily="34" charset="0"/>
-                <a:ea typeface="Calibri" pitchFamily="34" charset="-122"/>
-                <a:cs typeface="Calibri" pitchFamily="34" charset="-120"/>
-              </a:rPr>
-              <a:t>大東文化大学・東洋大学・立教大学</a:t>
-            </a:r>
-            <a:endParaRPr lang="en-US" sz="950" dirty="0"/>
-          </a:p>
-        </p:txBody>
-      </p:sp>
-      <p:sp>
-        <p:nvSpPr>
-          <p:cNvPr id="66" name="Shape 64"/>
-          <p:cNvSpPr/>
-          <p:nvPr/>
-        </p:nvSpPr>
-        <p:spPr>
-          <a:xfrm>
-            <a:off x="6784848" y="4297680"/>
-            <a:ext cx="1737360" cy="201168"/>
-          </a:xfrm>
-          <a:prstGeom prst="rect">
-            <a:avLst/>
-          </a:prstGeom>
-          <a:solidFill>
-            <a:srgbClr val="156818"/>
-          </a:solidFill>
-          <a:ln/>
-        </p:spPr>
-      </p:sp>
-      <p:sp>
-        <p:nvSpPr>
-          <p:cNvPr id="67" name="Text 65"/>
-          <p:cNvSpPr/>
-          <p:nvPr/>
-        </p:nvSpPr>
-        <p:spPr>
-          <a:xfrm>
-            <a:off x="6784848" y="4297680"/>
-            <a:ext cx="1737360" cy="201168"/>
-          </a:xfrm>
-          <a:prstGeom prst="rect">
-            <a:avLst/>
-          </a:prstGeom>
-          <a:noFill/>
-          <a:ln/>
-        </p:spPr>
-        <p:txBody>
-          <a:bodyPr wrap="square" rtlCol="0" anchor="ctr"/>
-          <a:lstStyle/>
-          <a:p>
-            <a:pPr algn="ctr" indent="0" marL="0">
-              <a:buNone/>
-            </a:pPr>
-            <a:r>
-              <a:rPr lang="en-US" sz="950" b="1" dirty="0">
+              <a:rPr lang="en-US" sz="1050" b="1" dirty="0">
                 <a:solidFill>
                   <a:srgbClr val="FFFFFF"/>
                 </a:solidFill>
@@ -16486,380 +17211,7 @@
                 <a:ea typeface="Calibri" pitchFamily="34" charset="-122"/>
                 <a:cs typeface="Calibri" pitchFamily="34" charset="-120"/>
               </a:rPr>
-              <a:t>確定</a:t>
-            </a:r>
-            <a:endParaRPr lang="en-US" sz="950" dirty="0"/>
-          </a:p>
-        </p:txBody>
-      </p:sp>
-      <p:sp>
-        <p:nvSpPr>
-          <p:cNvPr id="68" name="Shape 66"/>
-          <p:cNvSpPr/>
-          <p:nvPr/>
-        </p:nvSpPr>
-        <p:spPr>
-          <a:xfrm>
-            <a:off x="365760" y="4498848"/>
-            <a:ext cx="8412480" cy="201168"/>
-          </a:xfrm>
-          <a:prstGeom prst="rect">
-            <a:avLst/>
-          </a:prstGeom>
-          <a:solidFill>
-            <a:srgbClr val="F3F3F3"/>
-          </a:solidFill>
-          <a:ln/>
-        </p:spPr>
-      </p:sp>
-      <p:sp>
-        <p:nvSpPr>
-          <p:cNvPr id="69" name="Text 67"/>
-          <p:cNvSpPr/>
-          <p:nvPr/>
-        </p:nvSpPr>
-        <p:spPr>
-          <a:xfrm>
-            <a:off x="475488" y="4498848"/>
-            <a:ext cx="1280160" cy="201168"/>
-          </a:xfrm>
-          <a:prstGeom prst="rect">
-            <a:avLst/>
-          </a:prstGeom>
-          <a:noFill/>
-          <a:ln/>
-        </p:spPr>
-        <p:txBody>
-          <a:bodyPr wrap="square" rtlCol="0" anchor="ctr"/>
-          <a:lstStyle/>
-          <a:p>
-            <a:pPr indent="0" marL="0">
-              <a:buNone/>
-            </a:pPr>
-            <a:r>
-              <a:rPr lang="en-US" sz="950" dirty="0">
-                <a:solidFill>
-                  <a:srgbClr val="333333"/>
-                </a:solidFill>
-                <a:latin typeface="Calibri" pitchFamily="34" charset="0"/>
-                <a:ea typeface="Calibri" pitchFamily="34" charset="-122"/>
-                <a:cs typeface="Calibri" pitchFamily="34" charset="-120"/>
-              </a:rPr>
-              <a:t>調整中</a:t>
-            </a:r>
-            <a:endParaRPr lang="en-US" sz="950" dirty="0"/>
-          </a:p>
-        </p:txBody>
-      </p:sp>
-      <p:sp>
-        <p:nvSpPr>
-          <p:cNvPr id="70" name="Text 68"/>
-          <p:cNvSpPr/>
-          <p:nvPr/>
-        </p:nvSpPr>
-        <p:spPr>
-          <a:xfrm>
-            <a:off x="1847088" y="4498848"/>
-            <a:ext cx="4846320" cy="201168"/>
-          </a:xfrm>
-          <a:prstGeom prst="rect">
-            <a:avLst/>
-          </a:prstGeom>
-          <a:noFill/>
-          <a:ln/>
-        </p:spPr>
-        <p:txBody>
-          <a:bodyPr wrap="square" rtlCol="0" anchor="ctr"/>
-          <a:lstStyle/>
-          <a:p>
-            <a:pPr indent="0" marL="0">
-              <a:buNone/>
-            </a:pPr>
-            <a:r>
-              <a:rPr lang="en-US" sz="950" dirty="0">
-                <a:solidFill>
-                  <a:srgbClr val="333333"/>
-                </a:solidFill>
-                <a:latin typeface="Calibri" pitchFamily="34" charset="0"/>
-                <a:ea typeface="Calibri" pitchFamily="34" charset="-122"/>
-                <a:cs typeface="Calibri" pitchFamily="34" charset="-120"/>
-              </a:rPr>
-              <a:t>—</a:t>
-            </a:r>
-            <a:endParaRPr lang="en-US" sz="950" dirty="0"/>
-          </a:p>
-        </p:txBody>
-      </p:sp>
-      <p:sp>
-        <p:nvSpPr>
-          <p:cNvPr id="71" name="Shape 69"/>
-          <p:cNvSpPr/>
-          <p:nvPr/>
-        </p:nvSpPr>
-        <p:spPr>
-          <a:xfrm>
-            <a:off x="6784848" y="4498848"/>
-            <a:ext cx="1737360" cy="201168"/>
-          </a:xfrm>
-          <a:prstGeom prst="rect">
-            <a:avLst/>
-          </a:prstGeom>
-          <a:solidFill>
-            <a:srgbClr val="E65100"/>
-          </a:solidFill>
-          <a:ln/>
-        </p:spPr>
-      </p:sp>
-      <p:sp>
-        <p:nvSpPr>
-          <p:cNvPr id="72" name="Text 70"/>
-          <p:cNvSpPr/>
-          <p:nvPr/>
-        </p:nvSpPr>
-        <p:spPr>
-          <a:xfrm>
-            <a:off x="6784848" y="4498848"/>
-            <a:ext cx="1737360" cy="201168"/>
-          </a:xfrm>
-          <a:prstGeom prst="rect">
-            <a:avLst/>
-          </a:prstGeom>
-          <a:noFill/>
-          <a:ln/>
-        </p:spPr>
-        <p:txBody>
-          <a:bodyPr wrap="square" rtlCol="0" anchor="ctr"/>
-          <a:lstStyle/>
-          <a:p>
-            <a:pPr algn="ctr" indent="0" marL="0">
-              <a:buNone/>
-            </a:pPr>
-            <a:r>
-              <a:rPr lang="en-US" sz="950" b="1" dirty="0">
-                <a:solidFill>
-                  <a:srgbClr val="FFFFFF"/>
-                </a:solidFill>
-                <a:latin typeface="Calibri" pitchFamily="34" charset="0"/>
-                <a:ea typeface="Calibri" pitchFamily="34" charset="-122"/>
-                <a:cs typeface="Calibri" pitchFamily="34" charset="-120"/>
-              </a:rPr>
-              <a:t>アポ取得中</a:t>
-            </a:r>
-            <a:endParaRPr lang="en-US" sz="950" dirty="0"/>
-          </a:p>
-        </p:txBody>
-      </p:sp>
-      <p:sp>
-        <p:nvSpPr>
-          <p:cNvPr id="73" name="Shape 71"/>
-          <p:cNvSpPr/>
-          <p:nvPr/>
-        </p:nvSpPr>
-        <p:spPr>
-          <a:xfrm>
-            <a:off x="365760" y="4700016"/>
-            <a:ext cx="8412480" cy="201168"/>
-          </a:xfrm>
-          <a:prstGeom prst="rect">
-            <a:avLst/>
-          </a:prstGeom>
-          <a:solidFill>
-            <a:srgbClr val="FFFFFF"/>
-          </a:solidFill>
-          <a:ln/>
-        </p:spPr>
-      </p:sp>
-      <p:sp>
-        <p:nvSpPr>
-          <p:cNvPr id="74" name="Text 72"/>
-          <p:cNvSpPr/>
-          <p:nvPr/>
-        </p:nvSpPr>
-        <p:spPr>
-          <a:xfrm>
-            <a:off x="475488" y="4700016"/>
-            <a:ext cx="1280160" cy="201168"/>
-          </a:xfrm>
-          <a:prstGeom prst="rect">
-            <a:avLst/>
-          </a:prstGeom>
-          <a:noFill/>
-          <a:ln/>
-        </p:spPr>
-        <p:txBody>
-          <a:bodyPr wrap="square" rtlCol="0" anchor="ctr"/>
-          <a:lstStyle/>
-          <a:p>
-            <a:pPr indent="0" marL="0">
-              <a:buNone/>
-            </a:pPr>
-            <a:r>
-              <a:rPr lang="en-US" sz="950" dirty="0">
-                <a:solidFill>
-                  <a:srgbClr val="333333"/>
-                </a:solidFill>
-                <a:latin typeface="Calibri" pitchFamily="34" charset="0"/>
-                <a:ea typeface="Calibri" pitchFamily="34" charset="-122"/>
-                <a:cs typeface="Calibri" pitchFamily="34" charset="-120"/>
-              </a:rPr>
-              <a:t>調整中</a:t>
-            </a:r>
-            <a:endParaRPr lang="en-US" sz="950" dirty="0"/>
-          </a:p>
-        </p:txBody>
-      </p:sp>
-      <p:sp>
-        <p:nvSpPr>
-          <p:cNvPr id="75" name="Text 73"/>
-          <p:cNvSpPr/>
-          <p:nvPr/>
-        </p:nvSpPr>
-        <p:spPr>
-          <a:xfrm>
-            <a:off x="1847088" y="4700016"/>
-            <a:ext cx="4846320" cy="201168"/>
-          </a:xfrm>
-          <a:prstGeom prst="rect">
-            <a:avLst/>
-          </a:prstGeom>
-          <a:noFill/>
-          <a:ln/>
-        </p:spPr>
-        <p:txBody>
-          <a:bodyPr wrap="square" rtlCol="0" anchor="ctr"/>
-          <a:lstStyle/>
-          <a:p>
-            <a:pPr indent="0" marL="0">
-              <a:buNone/>
-            </a:pPr>
-            <a:r>
-              <a:rPr lang="en-US" sz="950" dirty="0">
-                <a:solidFill>
-                  <a:srgbClr val="333333"/>
-                </a:solidFill>
-                <a:latin typeface="Calibri" pitchFamily="34" charset="0"/>
-                <a:ea typeface="Calibri" pitchFamily="34" charset="-122"/>
-                <a:cs typeface="Calibri" pitchFamily="34" charset="-120"/>
-              </a:rPr>
-              <a:t>—</a:t>
-            </a:r>
-            <a:endParaRPr lang="en-US" sz="950" dirty="0"/>
-          </a:p>
-        </p:txBody>
-      </p:sp>
-      <p:sp>
-        <p:nvSpPr>
-          <p:cNvPr id="76" name="Shape 74"/>
-          <p:cNvSpPr/>
-          <p:nvPr/>
-        </p:nvSpPr>
-        <p:spPr>
-          <a:xfrm>
-            <a:off x="6784848" y="4700016"/>
-            <a:ext cx="1737360" cy="201168"/>
-          </a:xfrm>
-          <a:prstGeom prst="rect">
-            <a:avLst/>
-          </a:prstGeom>
-          <a:solidFill>
-            <a:srgbClr val="E65100"/>
-          </a:solidFill>
-          <a:ln/>
-        </p:spPr>
-      </p:sp>
-      <p:sp>
-        <p:nvSpPr>
-          <p:cNvPr id="77" name="Text 75"/>
-          <p:cNvSpPr/>
-          <p:nvPr/>
-        </p:nvSpPr>
-        <p:spPr>
-          <a:xfrm>
-            <a:off x="6784848" y="4700016"/>
-            <a:ext cx="1737360" cy="201168"/>
-          </a:xfrm>
-          <a:prstGeom prst="rect">
-            <a:avLst/>
-          </a:prstGeom>
-          <a:noFill/>
-          <a:ln/>
-        </p:spPr>
-        <p:txBody>
-          <a:bodyPr wrap="square" rtlCol="0" anchor="ctr"/>
-          <a:lstStyle/>
-          <a:p>
-            <a:pPr algn="ctr" indent="0" marL="0">
-              <a:buNone/>
-            </a:pPr>
-            <a:r>
-              <a:rPr lang="en-US" sz="950" b="1" dirty="0">
-                <a:solidFill>
-                  <a:srgbClr val="FFFFFF"/>
-                </a:solidFill>
-                <a:latin typeface="Calibri" pitchFamily="34" charset="0"/>
-                <a:ea typeface="Calibri" pitchFamily="34" charset="-122"/>
-                <a:cs typeface="Calibri" pitchFamily="34" charset="-120"/>
-              </a:rPr>
-              <a:t>アポ取得中</a:t>
-            </a:r>
-            <a:endParaRPr lang="en-US" sz="950" dirty="0"/>
-          </a:p>
-        </p:txBody>
-      </p:sp>
-      <p:sp>
-        <p:nvSpPr>
-          <p:cNvPr id="78" name="Shape 76"/>
-          <p:cNvSpPr/>
-          <p:nvPr/>
-        </p:nvSpPr>
-        <p:spPr>
-          <a:xfrm>
-            <a:off x="365760" y="4919472"/>
-            <a:ext cx="8412480" cy="201168"/>
-          </a:xfrm>
-          <a:prstGeom prst="rect">
-            <a:avLst/>
-          </a:prstGeom>
-          <a:solidFill>
-            <a:srgbClr val="DD7E6B"/>
-          </a:solidFill>
-          <a:ln/>
-        </p:spPr>
-      </p:sp>
-      <p:sp>
-        <p:nvSpPr>
-          <p:cNvPr id="79" name="Text 77"/>
-          <p:cNvSpPr/>
-          <p:nvPr/>
-        </p:nvSpPr>
-        <p:spPr>
-          <a:xfrm>
-            <a:off x="365760" y="4919472"/>
-            <a:ext cx="8412480" cy="201168"/>
-          </a:xfrm>
-          <a:prstGeom prst="rect">
-            <a:avLst/>
-          </a:prstGeom>
-          <a:noFill/>
-          <a:ln/>
-        </p:spPr>
-        <p:txBody>
-          <a:bodyPr wrap="square" rtlCol="0" anchor="ctr"/>
-          <a:lstStyle/>
-          <a:p>
-            <a:pPr algn="ctr" indent="0" marL="0">
-              <a:buNone/>
-            </a:pPr>
-            <a:r>
-              <a:rPr lang="en-US" sz="1050" b="1" dirty="0">
-                <a:solidFill>
-                  <a:srgbClr val="FFFFFF"/>
-                </a:solidFill>
-                <a:latin typeface="Calibri" pitchFamily="34" charset="0"/>
-                <a:ea typeface="Calibri" pitchFamily="34" charset="-122"/>
-                <a:cs typeface="Calibri" pitchFamily="34" charset="-120"/>
-              </a:rPr>
-              <a:t>7月末時点でのチェック：リスト作成完了・棚卸し完了・提案資料初稿完成</a:t>
+              <a:t>7月末チェック：対象36大学リスト完成・訪問日程仮決め完了・提案資料初稿完成</a:t>
             </a:r>
             <a:endParaRPr lang="en-US" sz="1050" dirty="0"/>
           </a:p>

--- a/事業計画書_営業戦略プラン_v2.pptx
+++ b/事業計画書_営業戦略プラン_v2.pptx
@@ -16129,7 +16129,7 @@
         <p:spPr>
           <a:xfrm>
             <a:off x="502920" y="3712464"/>
-            <a:ext cx="5943600" cy="219456"/>
+            <a:ext cx="5669280" cy="219456"/>
           </a:xfrm>
           <a:prstGeom prst="rect">
             <a:avLst/>
@@ -16153,7 +16153,7 @@
                 <a:ea typeface="Calibri" pitchFamily="34" charset="-122"/>
                 <a:cs typeface="Calibri" pitchFamily="34" charset="-120"/>
               </a:rPr>
-              <a:t>大学訪問スケジュール（対象36校 / 9・10月入学留学生ターゲット）</a:t>
+              <a:t>大学訪問スケジュール（対象36校 ／ 9・10月入学留学生ターゲット）</a:t>
             </a:r>
             <a:endParaRPr lang="en-US" sz="1050" dirty="0"/>
           </a:p>
@@ -16167,8 +16167,8 @@
         </p:nvSpPr>
         <p:spPr>
           <a:xfrm>
-            <a:off x="6492240" y="3712464"/>
-            <a:ext cx="2286000" cy="219456"/>
+            <a:off x="6217920" y="3712464"/>
+            <a:ext cx="2560320" cy="219456"/>
           </a:xfrm>
           <a:prstGeom prst="rect">
             <a:avLst/>
@@ -16184,17 +16184,17 @@
               <a:buNone/>
             </a:pPr>
             <a:r>
-              <a:rPr lang="en-US" sz="900" dirty="0">
-                <a:solidFill>
-                  <a:srgbClr val="FFFFFF"/>
-                </a:solidFill>
-                <a:latin typeface="Calibri" pitchFamily="34" charset="0"/>
-                <a:ea typeface="Calibri" pitchFamily="34" charset="-122"/>
-                <a:cs typeface="Calibri" pitchFamily="34" charset="-120"/>
-              </a:rPr>
-              <a:t>※7月末までに全日程仮決め</a:t>
-            </a:r>
-            <a:endParaRPr lang="en-US" sz="900" dirty="0"/>
+              <a:rPr lang="en-US" sz="950" b="1" dirty="0">
+                <a:solidFill>
+                  <a:srgbClr val="FFE066"/>
+                </a:solidFill>
+                <a:latin typeface="Calibri" pitchFamily="34" charset="0"/>
+                <a:ea typeface="Calibri" pitchFamily="34" charset="-122"/>
+                <a:cs typeface="Calibri" pitchFamily="34" charset="-120"/>
+              </a:rPr>
+              <a:t>⚠ 8月末までに訪問完了必須</a:t>
+            </a:r>
+            <a:endParaRPr lang="en-US" sz="950" dirty="0"/>
           </a:p>
         </p:txBody>
       </p:sp>
@@ -16227,7 +16227,7 @@
         <p:spPr>
           <a:xfrm>
             <a:off x="475488" y="3931920"/>
-            <a:ext cx="1188720" cy="182880"/>
+            <a:ext cx="1371600" cy="182880"/>
           </a:xfrm>
           <a:prstGeom prst="rect">
             <a:avLst/>
@@ -16265,8 +16265,8 @@
         </p:nvSpPr>
         <p:spPr>
           <a:xfrm>
-            <a:off x="1755648" y="3931920"/>
-            <a:ext cx="4937760" cy="182880"/>
+            <a:off x="1920240" y="3931920"/>
+            <a:ext cx="4754880" cy="182880"/>
           </a:xfrm>
           <a:prstGeom prst="rect">
             <a:avLst/>
@@ -16290,7 +16290,7 @@
                 <a:ea typeface="Calibri" pitchFamily="34" charset="-122"/>
                 <a:cs typeface="Calibri" pitchFamily="34" charset="-120"/>
               </a:rPr>
-              <a:t>訪問予定大学</a:t>
+              <a:t>訪問予定大学（抜粋）</a:t>
             </a:r>
             <a:endParaRPr lang="en-US" sz="900" dirty="0"/>
           </a:p>
@@ -16383,7 +16383,7 @@
         <p:spPr>
           <a:xfrm>
             <a:off x="365760" y="4114800"/>
-            <a:ext cx="8412480" cy="182880"/>
+            <a:ext cx="8412480" cy="201168"/>
           </a:xfrm>
           <a:prstGeom prst="rect">
             <a:avLst/>
@@ -16403,7 +16403,7 @@
         <p:spPr>
           <a:xfrm>
             <a:off x="475488" y="4114800"/>
-            <a:ext cx="1188720" cy="182880"/>
+            <a:ext cx="1371600" cy="201168"/>
           </a:xfrm>
           <a:prstGeom prst="rect">
             <a:avLst/>
@@ -16441,8 +16441,8 @@
         </p:nvSpPr>
         <p:spPr>
           <a:xfrm>
-            <a:off x="1755648" y="4114800"/>
-            <a:ext cx="4919472" cy="182880"/>
+            <a:off x="1920240" y="4114800"/>
+            <a:ext cx="4736592" cy="201168"/>
           </a:xfrm>
           <a:prstGeom prst="rect">
             <a:avLst/>
@@ -16458,6 +16458,163 @@
               <a:buNone/>
             </a:pPr>
             <a:r>
+              <a:rPr lang="en-US" sz="900" dirty="0">
+                <a:solidFill>
+                  <a:srgbClr val="333333"/>
+                </a:solidFill>
+                <a:latin typeface="Calibri" pitchFamily="34" charset="0"/>
+                <a:ea typeface="Calibri" pitchFamily="34" charset="-122"/>
+                <a:cs typeface="Calibri" pitchFamily="34" charset="-120"/>
+              </a:rPr>
+              <a:t>大東文化大・東洋大・立教大（7/27確定）＋追加校調整中</a:t>
+            </a:r>
+            <a:endParaRPr lang="en-US" sz="900" dirty="0"/>
+          </a:p>
+        </p:txBody>
+      </p:sp>
+      <p:sp>
+        <p:nvSpPr>
+          <p:cNvPr id="67" name="Text 65"/>
+          <p:cNvSpPr/>
+          <p:nvPr/>
+        </p:nvSpPr>
+        <p:spPr>
+          <a:xfrm>
+            <a:off x="6748272" y="4114800"/>
+            <a:ext cx="640080" cy="201168"/>
+          </a:xfrm>
+          <a:prstGeom prst="rect">
+            <a:avLst/>
+          </a:prstGeom>
+          <a:noFill/>
+          <a:ln/>
+        </p:spPr>
+        <p:txBody>
+          <a:bodyPr wrap="square" rtlCol="0" anchor="ctr"/>
+          <a:lstStyle/>
+          <a:p>
+            <a:pPr algn="ctr" indent="0" marL="0">
+              <a:buNone/>
+            </a:pPr>
+            <a:r>
+              <a:rPr lang="en-US" sz="900" b="1" dirty="0">
+                <a:solidFill>
+                  <a:srgbClr val="333333"/>
+                </a:solidFill>
+                <a:latin typeface="Calibri" pitchFamily="34" charset="0"/>
+                <a:ea typeface="Calibri" pitchFamily="34" charset="-122"/>
+                <a:cs typeface="Calibri" pitchFamily="34" charset="-120"/>
+              </a:rPr>
+              <a:t>〜5校</a:t>
+            </a:r>
+            <a:endParaRPr lang="en-US" sz="900" dirty="0"/>
+          </a:p>
+        </p:txBody>
+      </p:sp>
+      <p:sp>
+        <p:nvSpPr>
+          <p:cNvPr id="68" name="Shape 66"/>
+          <p:cNvSpPr/>
+          <p:nvPr/>
+        </p:nvSpPr>
+        <p:spPr>
+          <a:xfrm>
+            <a:off x="7443216" y="4114800"/>
+            <a:ext cx="1298448" cy="201168"/>
+          </a:xfrm>
+          <a:prstGeom prst="rect">
+            <a:avLst/>
+          </a:prstGeom>
+          <a:solidFill>
+            <a:srgbClr val="156818"/>
+          </a:solidFill>
+          <a:ln/>
+        </p:spPr>
+      </p:sp>
+      <p:sp>
+        <p:nvSpPr>
+          <p:cNvPr id="69" name="Text 67"/>
+          <p:cNvSpPr/>
+          <p:nvPr/>
+        </p:nvSpPr>
+        <p:spPr>
+          <a:xfrm>
+            <a:off x="7443216" y="4114800"/>
+            <a:ext cx="1298448" cy="201168"/>
+          </a:xfrm>
+          <a:prstGeom prst="rect">
+            <a:avLst/>
+          </a:prstGeom>
+          <a:noFill/>
+          <a:ln/>
+        </p:spPr>
+        <p:txBody>
+          <a:bodyPr wrap="square" rtlCol="0" anchor="ctr"/>
+          <a:lstStyle/>
+          <a:p>
+            <a:pPr algn="ctr" indent="0" marL="0">
+              <a:buNone/>
+            </a:pPr>
+            <a:r>
+              <a:rPr lang="en-US" sz="850" b="1" dirty="0">
+                <a:solidFill>
+                  <a:srgbClr val="FFFFFF"/>
+                </a:solidFill>
+                <a:latin typeface="Calibri" pitchFamily="34" charset="0"/>
+                <a:ea typeface="Calibri" pitchFamily="34" charset="-122"/>
+                <a:cs typeface="Calibri" pitchFamily="34" charset="-120"/>
+              </a:rPr>
+              <a:t>一部確定</a:t>
+            </a:r>
+            <a:endParaRPr lang="en-US" sz="850" dirty="0"/>
+          </a:p>
+        </p:txBody>
+      </p:sp>
+      <p:sp>
+        <p:nvSpPr>
+          <p:cNvPr id="70" name="Shape 68"/>
+          <p:cNvSpPr/>
+          <p:nvPr/>
+        </p:nvSpPr>
+        <p:spPr>
+          <a:xfrm>
+            <a:off x="365760" y="4315968"/>
+            <a:ext cx="8412480" cy="201168"/>
+          </a:xfrm>
+          <a:prstGeom prst="rect">
+            <a:avLst/>
+          </a:prstGeom>
+          <a:solidFill>
+            <a:srgbClr val="F3F3F3"/>
+          </a:solidFill>
+          <a:ln/>
+        </p:spPr>
+      </p:sp>
+      <p:sp>
+        <p:nvSpPr>
+          <p:cNvPr id="71" name="Text 69"/>
+          <p:cNvSpPr/>
+          <p:nvPr/>
+        </p:nvSpPr>
+        <p:spPr>
+          <a:xfrm>
+            <a:off x="475488" y="4315968"/>
+            <a:ext cx="1371600" cy="201168"/>
+          </a:xfrm>
+          <a:prstGeom prst="rect">
+            <a:avLst/>
+          </a:prstGeom>
+          <a:noFill/>
+          <a:ln/>
+        </p:spPr>
+        <p:txBody>
+          <a:bodyPr wrap="square" rtlCol="0" anchor="ctr"/>
+          <a:lstStyle/>
+          <a:p>
+            <a:pPr indent="0" marL="0">
+              <a:buNone/>
+            </a:pPr>
+            <a:r>
               <a:rPr lang="en-US" sz="950" dirty="0">
                 <a:solidFill>
                   <a:srgbClr val="333333"/>
@@ -16466,7 +16623,7 @@
                 <a:ea typeface="Calibri" pitchFamily="34" charset="-122"/>
                 <a:cs typeface="Calibri" pitchFamily="34" charset="-120"/>
               </a:rPr>
-              <a:t>大東文化大・東洋大・立教大（7/27確定）＋追加校調整中</a:t>
+              <a:t>8月前半（1〜15日）</a:t>
             </a:r>
             <a:endParaRPr lang="en-US" sz="950" dirty="0"/>
           </a:p>
@@ -16474,14 +16631,53 @@
       </p:sp>
       <p:sp>
         <p:nvSpPr>
-          <p:cNvPr id="67" name="Text 65"/>
-          <p:cNvSpPr/>
-          <p:nvPr/>
-        </p:nvSpPr>
-        <p:spPr>
-          <a:xfrm>
-            <a:off x="6748272" y="4114800"/>
-            <a:ext cx="640080" cy="182880"/>
+          <p:cNvPr id="72" name="Text 70"/>
+          <p:cNvSpPr/>
+          <p:nvPr/>
+        </p:nvSpPr>
+        <p:spPr>
+          <a:xfrm>
+            <a:off x="1920240" y="4315968"/>
+            <a:ext cx="4736592" cy="201168"/>
+          </a:xfrm>
+          <a:prstGeom prst="rect">
+            <a:avLst/>
+          </a:prstGeom>
+          <a:noFill/>
+          <a:ln/>
+        </p:spPr>
+        <p:txBody>
+          <a:bodyPr wrap="square" rtlCol="0" anchor="ctr"/>
+          <a:lstStyle/>
+          <a:p>
+            <a:pPr indent="0" marL="0">
+              <a:buNone/>
+            </a:pPr>
+            <a:r>
+              <a:rPr lang="en-US" sz="900" dirty="0">
+                <a:solidFill>
+                  <a:srgbClr val="333333"/>
+                </a:solidFill>
+                <a:latin typeface="Calibri" pitchFamily="34" charset="0"/>
+                <a:ea typeface="Calibri" pitchFamily="34" charset="-122"/>
+                <a:cs typeface="Calibri" pitchFamily="34" charset="-120"/>
+              </a:rPr>
+              <a:t>調整中（早稲田・明治・法政・慶應・上智・東洋理科・都立大 ほか）</a:t>
+            </a:r>
+            <a:endParaRPr lang="en-US" sz="900" dirty="0"/>
+          </a:p>
+        </p:txBody>
+      </p:sp>
+      <p:sp>
+        <p:nvSpPr>
+          <p:cNvPr id="73" name="Text 71"/>
+          <p:cNvSpPr/>
+          <p:nvPr/>
+        </p:nvSpPr>
+        <p:spPr>
+          <a:xfrm>
+            <a:off x="6748272" y="4315968"/>
+            <a:ext cx="640080" cy="201168"/>
           </a:xfrm>
           <a:prstGeom prst="rect">
             <a:avLst/>
@@ -16505,7 +16701,7 @@
                 <a:ea typeface="Calibri" pitchFamily="34" charset="-122"/>
                 <a:cs typeface="Calibri" pitchFamily="34" charset="-120"/>
               </a:rPr>
-              <a:t>〜5校</a:t>
+              <a:t>〜16校</a:t>
             </a:r>
             <a:endParaRPr lang="en-US" sz="900" dirty="0"/>
           </a:p>
@@ -16513,34 +16709,34 @@
       </p:sp>
       <p:sp>
         <p:nvSpPr>
-          <p:cNvPr id="68" name="Shape 66"/>
-          <p:cNvSpPr/>
-          <p:nvPr/>
-        </p:nvSpPr>
-        <p:spPr>
-          <a:xfrm>
-            <a:off x="7443216" y="4114800"/>
-            <a:ext cx="1298448" cy="182880"/>
-          </a:xfrm>
-          <a:prstGeom prst="rect">
-            <a:avLst/>
-          </a:prstGeom>
-          <a:solidFill>
-            <a:srgbClr val="156818"/>
-          </a:solidFill>
-          <a:ln/>
-        </p:spPr>
-      </p:sp>
-      <p:sp>
-        <p:nvSpPr>
-          <p:cNvPr id="69" name="Text 67"/>
-          <p:cNvSpPr/>
-          <p:nvPr/>
-        </p:nvSpPr>
-        <p:spPr>
-          <a:xfrm>
-            <a:off x="7443216" y="4114800"/>
-            <a:ext cx="1298448" cy="182880"/>
+          <p:cNvPr id="74" name="Shape 72"/>
+          <p:cNvSpPr/>
+          <p:nvPr/>
+        </p:nvSpPr>
+        <p:spPr>
+          <a:xfrm>
+            <a:off x="7443216" y="4315968"/>
+            <a:ext cx="1298448" cy="201168"/>
+          </a:xfrm>
+          <a:prstGeom prst="rect">
+            <a:avLst/>
+          </a:prstGeom>
+          <a:solidFill>
+            <a:srgbClr val="E65100"/>
+          </a:solidFill>
+          <a:ln/>
+        </p:spPr>
+      </p:sp>
+      <p:sp>
+        <p:nvSpPr>
+          <p:cNvPr id="75" name="Text 73"/>
+          <p:cNvSpPr/>
+          <p:nvPr/>
+        </p:nvSpPr>
+        <p:spPr>
+          <a:xfrm>
+            <a:off x="7443216" y="4315968"/>
+            <a:ext cx="1298448" cy="201168"/>
           </a:xfrm>
           <a:prstGeom prst="rect">
             <a:avLst/>
@@ -16564,7 +16760,7 @@
                 <a:ea typeface="Calibri" pitchFamily="34" charset="-122"/>
                 <a:cs typeface="Calibri" pitchFamily="34" charset="-120"/>
               </a:rPr>
-              <a:t>一部確定</a:t>
+              <a:t>アポ取得中</a:t>
             </a:r>
             <a:endParaRPr lang="en-US" sz="850" dirty="0"/>
           </a:p>
@@ -16572,34 +16768,34 @@
       </p:sp>
       <p:sp>
         <p:nvSpPr>
-          <p:cNvPr id="70" name="Shape 68"/>
-          <p:cNvSpPr/>
-          <p:nvPr/>
-        </p:nvSpPr>
-        <p:spPr>
-          <a:xfrm>
-            <a:off x="365760" y="4297680"/>
-            <a:ext cx="8412480" cy="182880"/>
-          </a:xfrm>
-          <a:prstGeom prst="rect">
-            <a:avLst/>
-          </a:prstGeom>
-          <a:solidFill>
-            <a:srgbClr val="F3F3F3"/>
-          </a:solidFill>
-          <a:ln/>
-        </p:spPr>
-      </p:sp>
-      <p:sp>
-        <p:nvSpPr>
-          <p:cNvPr id="71" name="Text 69"/>
-          <p:cNvSpPr/>
-          <p:nvPr/>
-        </p:nvSpPr>
-        <p:spPr>
-          <a:xfrm>
-            <a:off x="475488" y="4297680"/>
-            <a:ext cx="1188720" cy="182880"/>
+          <p:cNvPr id="76" name="Shape 74"/>
+          <p:cNvSpPr/>
+          <p:nvPr/>
+        </p:nvSpPr>
+        <p:spPr>
+          <a:xfrm>
+            <a:off x="365760" y="4517136"/>
+            <a:ext cx="8412480" cy="201168"/>
+          </a:xfrm>
+          <a:prstGeom prst="rect">
+            <a:avLst/>
+          </a:prstGeom>
+          <a:solidFill>
+            <a:srgbClr val="FFFFFF"/>
+          </a:solidFill>
+          <a:ln/>
+        </p:spPr>
+      </p:sp>
+      <p:sp>
+        <p:nvSpPr>
+          <p:cNvPr id="77" name="Text 75"/>
+          <p:cNvSpPr/>
+          <p:nvPr/>
+        </p:nvSpPr>
+        <p:spPr>
+          <a:xfrm>
+            <a:off x="475488" y="4517136"/>
+            <a:ext cx="1371600" cy="201168"/>
           </a:xfrm>
           <a:prstGeom prst="rect">
             <a:avLst/>
@@ -16623,7 +16819,7 @@
                 <a:ea typeface="Calibri" pitchFamily="34" charset="-122"/>
                 <a:cs typeface="Calibri" pitchFamily="34" charset="-120"/>
               </a:rPr>
-              <a:t>8月</a:t>
+              <a:t>8月後半（16〜31日）</a:t>
             </a:r>
             <a:endParaRPr lang="en-US" sz="950" dirty="0"/>
           </a:p>
@@ -16631,14 +16827,14 @@
       </p:sp>
       <p:sp>
         <p:nvSpPr>
-          <p:cNvPr id="72" name="Text 70"/>
-          <p:cNvSpPr/>
-          <p:nvPr/>
-        </p:nvSpPr>
-        <p:spPr>
-          <a:xfrm>
-            <a:off x="1755648" y="4297680"/>
-            <a:ext cx="4919472" cy="182880"/>
+          <p:cNvPr id="78" name="Text 76"/>
+          <p:cNvSpPr/>
+          <p:nvPr/>
+        </p:nvSpPr>
+        <p:spPr>
+          <a:xfrm>
+            <a:off x="1920240" y="4517136"/>
+            <a:ext cx="4736592" cy="201168"/>
           </a:xfrm>
           <a:prstGeom prst="rect">
             <a:avLst/>
@@ -16654,7 +16850,7 @@
               <a:buNone/>
             </a:pPr>
             <a:r>
-              <a:rPr lang="en-US" sz="950" dirty="0">
+              <a:rPr lang="en-US" sz="900" dirty="0">
                 <a:solidFill>
                   <a:srgbClr val="333333"/>
                 </a:solidFill>
@@ -16662,22 +16858,22 @@
                 <a:ea typeface="Calibri" pitchFamily="34" charset="-122"/>
                 <a:cs typeface="Calibri" pitchFamily="34" charset="-120"/>
               </a:rPr>
-              <a:t>調整中</a:t>
-            </a:r>
-            <a:endParaRPr lang="en-US" sz="950" dirty="0"/>
-          </a:p>
-        </p:txBody>
-      </p:sp>
-      <p:sp>
-        <p:nvSpPr>
-          <p:cNvPr id="73" name="Text 71"/>
-          <p:cNvSpPr/>
-          <p:nvPr/>
-        </p:nvSpPr>
-        <p:spPr>
-          <a:xfrm>
-            <a:off x="6748272" y="4297680"/>
-            <a:ext cx="640080" cy="182880"/>
+              <a:t>調整中（帝京・桜美林・文教・駒澤・電通大・一橋・ICU ほか）</a:t>
+            </a:r>
+            <a:endParaRPr lang="en-US" sz="900" dirty="0"/>
+          </a:p>
+        </p:txBody>
+      </p:sp>
+      <p:sp>
+        <p:nvSpPr>
+          <p:cNvPr id="79" name="Text 77"/>
+          <p:cNvSpPr/>
+          <p:nvPr/>
+        </p:nvSpPr>
+        <p:spPr>
+          <a:xfrm>
+            <a:off x="6748272" y="4517136"/>
+            <a:ext cx="640080" cy="201168"/>
           </a:xfrm>
           <a:prstGeom prst="rect">
             <a:avLst/>
@@ -16701,7 +16897,7 @@
                 <a:ea typeface="Calibri" pitchFamily="34" charset="-122"/>
                 <a:cs typeface="Calibri" pitchFamily="34" charset="-120"/>
               </a:rPr>
-              <a:t>〜12校</a:t>
+              <a:t>〜15校</a:t>
             </a:r>
             <a:endParaRPr lang="en-US" sz="900" dirty="0"/>
           </a:p>
@@ -16709,34 +16905,34 @@
       </p:sp>
       <p:sp>
         <p:nvSpPr>
-          <p:cNvPr id="74" name="Shape 72"/>
-          <p:cNvSpPr/>
-          <p:nvPr/>
-        </p:nvSpPr>
-        <p:spPr>
-          <a:xfrm>
-            <a:off x="7443216" y="4297680"/>
-            <a:ext cx="1298448" cy="182880"/>
-          </a:xfrm>
-          <a:prstGeom prst="rect">
-            <a:avLst/>
-          </a:prstGeom>
-          <a:solidFill>
-            <a:srgbClr val="E65100"/>
-          </a:solidFill>
-          <a:ln/>
-        </p:spPr>
-      </p:sp>
-      <p:sp>
-        <p:nvSpPr>
-          <p:cNvPr id="75" name="Text 73"/>
-          <p:cNvSpPr/>
-          <p:nvPr/>
-        </p:nvSpPr>
-        <p:spPr>
-          <a:xfrm>
-            <a:off x="7443216" y="4297680"/>
-            <a:ext cx="1298448" cy="182880"/>
+          <p:cNvPr id="80" name="Shape 78"/>
+          <p:cNvSpPr/>
+          <p:nvPr/>
+        </p:nvSpPr>
+        <p:spPr>
+          <a:xfrm>
+            <a:off x="7443216" y="4517136"/>
+            <a:ext cx="1298448" cy="201168"/>
+          </a:xfrm>
+          <a:prstGeom prst="rect">
+            <a:avLst/>
+          </a:prstGeom>
+          <a:solidFill>
+            <a:srgbClr val="999999"/>
+          </a:solidFill>
+          <a:ln/>
+        </p:spPr>
+      </p:sp>
+      <p:sp>
+        <p:nvSpPr>
+          <p:cNvPr id="81" name="Text 79"/>
+          <p:cNvSpPr/>
+          <p:nvPr/>
+        </p:nvSpPr>
+        <p:spPr>
+          <a:xfrm>
+            <a:off x="7443216" y="4517136"/>
+            <a:ext cx="1298448" cy="201168"/>
           </a:xfrm>
           <a:prstGeom prst="rect">
             <a:avLst/>
@@ -16760,7 +16956,7 @@
                 <a:ea typeface="Calibri" pitchFamily="34" charset="-122"/>
                 <a:cs typeface="Calibri" pitchFamily="34" charset="-120"/>
               </a:rPr>
-              <a:t>アポ取得中</a:t>
+              <a:t>未定</a:t>
             </a:r>
             <a:endParaRPr lang="en-US" sz="850" dirty="0"/>
           </a:p>
@@ -16768,112 +16964,34 @@
       </p:sp>
       <p:sp>
         <p:nvSpPr>
-          <p:cNvPr id="76" name="Shape 74"/>
-          <p:cNvSpPr/>
-          <p:nvPr/>
-        </p:nvSpPr>
-        <p:spPr>
-          <a:xfrm>
-            <a:off x="365760" y="4480560"/>
-            <a:ext cx="8412480" cy="182880"/>
-          </a:xfrm>
-          <a:prstGeom prst="rect">
-            <a:avLst/>
-          </a:prstGeom>
-          <a:solidFill>
-            <a:srgbClr val="FFFFFF"/>
-          </a:solidFill>
-          <a:ln/>
-        </p:spPr>
-      </p:sp>
-      <p:sp>
-        <p:nvSpPr>
-          <p:cNvPr id="77" name="Text 75"/>
-          <p:cNvSpPr/>
-          <p:nvPr/>
-        </p:nvSpPr>
-        <p:spPr>
-          <a:xfrm>
-            <a:off x="475488" y="4480560"/>
-            <a:ext cx="1188720" cy="182880"/>
-          </a:xfrm>
-          <a:prstGeom prst="rect">
-            <a:avLst/>
-          </a:prstGeom>
-          <a:noFill/>
-          <a:ln/>
-        </p:spPr>
-        <p:txBody>
-          <a:bodyPr wrap="square" rtlCol="0" anchor="ctr"/>
-          <a:lstStyle/>
-          <a:p>
-            <a:pPr indent="0" marL="0">
-              <a:buNone/>
-            </a:pPr>
-            <a:r>
-              <a:rPr lang="en-US" sz="950" dirty="0">
-                <a:solidFill>
-                  <a:srgbClr val="333333"/>
-                </a:solidFill>
-                <a:latin typeface="Calibri" pitchFamily="34" charset="0"/>
-                <a:ea typeface="Calibri" pitchFamily="34" charset="-122"/>
-                <a:cs typeface="Calibri" pitchFamily="34" charset="-120"/>
-              </a:rPr>
-              <a:t>9月</a:t>
-            </a:r>
-            <a:endParaRPr lang="en-US" sz="950" dirty="0"/>
-          </a:p>
-        </p:txBody>
-      </p:sp>
-      <p:sp>
-        <p:nvSpPr>
-          <p:cNvPr id="78" name="Text 76"/>
-          <p:cNvSpPr/>
-          <p:nvPr/>
-        </p:nvSpPr>
-        <p:spPr>
-          <a:xfrm>
-            <a:off x="1755648" y="4480560"/>
-            <a:ext cx="4919472" cy="182880"/>
-          </a:xfrm>
-          <a:prstGeom prst="rect">
-            <a:avLst/>
-          </a:prstGeom>
-          <a:noFill/>
-          <a:ln/>
-        </p:spPr>
-        <p:txBody>
-          <a:bodyPr wrap="square" rtlCol="0" anchor="ctr"/>
-          <a:lstStyle/>
-          <a:p>
-            <a:pPr indent="0" marL="0">
-              <a:buNone/>
-            </a:pPr>
-            <a:r>
-              <a:rPr lang="en-US" sz="950" dirty="0">
-                <a:solidFill>
-                  <a:srgbClr val="333333"/>
-                </a:solidFill>
-                <a:latin typeface="Calibri" pitchFamily="34" charset="0"/>
-                <a:ea typeface="Calibri" pitchFamily="34" charset="-122"/>
-                <a:cs typeface="Calibri" pitchFamily="34" charset="-120"/>
-              </a:rPr>
-              <a:t>調整中（9月入学前にアプローチ）</a:t>
-            </a:r>
-            <a:endParaRPr lang="en-US" sz="950" dirty="0"/>
-          </a:p>
-        </p:txBody>
-      </p:sp>
-      <p:sp>
-        <p:nvSpPr>
-          <p:cNvPr id="79" name="Text 77"/>
-          <p:cNvSpPr/>
-          <p:nvPr/>
-        </p:nvSpPr>
-        <p:spPr>
-          <a:xfrm>
-            <a:off x="6748272" y="4480560"/>
-            <a:ext cx="640080" cy="182880"/>
+          <p:cNvPr id="82" name="Shape 80"/>
+          <p:cNvSpPr/>
+          <p:nvPr/>
+        </p:nvSpPr>
+        <p:spPr>
+          <a:xfrm>
+            <a:off x="365760" y="4901184"/>
+            <a:ext cx="8412480" cy="201168"/>
+          </a:xfrm>
+          <a:prstGeom prst="rect">
+            <a:avLst/>
+          </a:prstGeom>
+          <a:solidFill>
+            <a:srgbClr val="DD7E6B"/>
+          </a:solidFill>
+          <a:ln/>
+        </p:spPr>
+      </p:sp>
+      <p:sp>
+        <p:nvSpPr>
+          <p:cNvPr id="83" name="Text 81"/>
+          <p:cNvSpPr/>
+          <p:nvPr/>
+        </p:nvSpPr>
+        <p:spPr>
+          <a:xfrm>
+            <a:off x="365760" y="4901184"/>
+            <a:ext cx="8412480" cy="201168"/>
           </a:xfrm>
           <a:prstGeom prst="rect">
             <a:avLst/>
@@ -16889,66 +17007,7 @@
               <a:buNone/>
             </a:pPr>
             <a:r>
-              <a:rPr lang="en-US" sz="900" b="1" dirty="0">
-                <a:solidFill>
-                  <a:srgbClr val="333333"/>
-                </a:solidFill>
-                <a:latin typeface="Calibri" pitchFamily="34" charset="0"/>
-                <a:ea typeface="Calibri" pitchFamily="34" charset="-122"/>
-                <a:cs typeface="Calibri" pitchFamily="34" charset="-120"/>
-              </a:rPr>
-              <a:t>〜12校</a:t>
-            </a:r>
-            <a:endParaRPr lang="en-US" sz="900" dirty="0"/>
-          </a:p>
-        </p:txBody>
-      </p:sp>
-      <p:sp>
-        <p:nvSpPr>
-          <p:cNvPr id="80" name="Shape 78"/>
-          <p:cNvSpPr/>
-          <p:nvPr/>
-        </p:nvSpPr>
-        <p:spPr>
-          <a:xfrm>
-            <a:off x="7443216" y="4480560"/>
-            <a:ext cx="1298448" cy="182880"/>
-          </a:xfrm>
-          <a:prstGeom prst="rect">
-            <a:avLst/>
-          </a:prstGeom>
-          <a:solidFill>
-            <a:srgbClr val="999999"/>
-          </a:solidFill>
-          <a:ln/>
-        </p:spPr>
-      </p:sp>
-      <p:sp>
-        <p:nvSpPr>
-          <p:cNvPr id="81" name="Text 79"/>
-          <p:cNvSpPr/>
-          <p:nvPr/>
-        </p:nvSpPr>
-        <p:spPr>
-          <a:xfrm>
-            <a:off x="7443216" y="4480560"/>
-            <a:ext cx="1298448" cy="182880"/>
-          </a:xfrm>
-          <a:prstGeom prst="rect">
-            <a:avLst/>
-          </a:prstGeom>
-          <a:noFill/>
-          <a:ln/>
-        </p:spPr>
-        <p:txBody>
-          <a:bodyPr wrap="square" rtlCol="0" anchor="ctr"/>
-          <a:lstStyle/>
-          <a:p>
-            <a:pPr algn="ctr" indent="0" marL="0">
-              <a:buNone/>
-            </a:pPr>
-            <a:r>
-              <a:rPr lang="en-US" sz="850" b="1" dirty="0">
+              <a:rPr lang="en-US" sz="1050" b="1" dirty="0">
                 <a:solidFill>
                   <a:srgbClr val="FFFFFF"/>
                 </a:solidFill>
@@ -16956,262 +17015,7 @@
                 <a:ea typeface="Calibri" pitchFamily="34" charset="-122"/>
                 <a:cs typeface="Calibri" pitchFamily="34" charset="-120"/>
               </a:rPr>
-              <a:t>未定</a:t>
-            </a:r>
-            <a:endParaRPr lang="en-US" sz="850" dirty="0"/>
-          </a:p>
-        </p:txBody>
-      </p:sp>
-      <p:sp>
-        <p:nvSpPr>
-          <p:cNvPr id="82" name="Shape 80"/>
-          <p:cNvSpPr/>
-          <p:nvPr/>
-        </p:nvSpPr>
-        <p:spPr>
-          <a:xfrm>
-            <a:off x="365760" y="4663440"/>
-            <a:ext cx="8412480" cy="182880"/>
-          </a:xfrm>
-          <a:prstGeom prst="rect">
-            <a:avLst/>
-          </a:prstGeom>
-          <a:solidFill>
-            <a:srgbClr val="F3F3F3"/>
-          </a:solidFill>
-          <a:ln/>
-        </p:spPr>
-      </p:sp>
-      <p:sp>
-        <p:nvSpPr>
-          <p:cNvPr id="83" name="Text 81"/>
-          <p:cNvSpPr/>
-          <p:nvPr/>
-        </p:nvSpPr>
-        <p:spPr>
-          <a:xfrm>
-            <a:off x="475488" y="4663440"/>
-            <a:ext cx="1188720" cy="182880"/>
-          </a:xfrm>
-          <a:prstGeom prst="rect">
-            <a:avLst/>
-          </a:prstGeom>
-          <a:noFill/>
-          <a:ln/>
-        </p:spPr>
-        <p:txBody>
-          <a:bodyPr wrap="square" rtlCol="0" anchor="ctr"/>
-          <a:lstStyle/>
-          <a:p>
-            <a:pPr indent="0" marL="0">
-              <a:buNone/>
-            </a:pPr>
-            <a:r>
-              <a:rPr lang="en-US" sz="950" dirty="0">
-                <a:solidFill>
-                  <a:srgbClr val="333333"/>
-                </a:solidFill>
-                <a:latin typeface="Calibri" pitchFamily="34" charset="0"/>
-                <a:ea typeface="Calibri" pitchFamily="34" charset="-122"/>
-                <a:cs typeface="Calibri" pitchFamily="34" charset="-120"/>
-              </a:rPr>
-              <a:t>10月</a:t>
-            </a:r>
-            <a:endParaRPr lang="en-US" sz="950" dirty="0"/>
-          </a:p>
-        </p:txBody>
-      </p:sp>
-      <p:sp>
-        <p:nvSpPr>
-          <p:cNvPr id="84" name="Text 82"/>
-          <p:cNvSpPr/>
-          <p:nvPr/>
-        </p:nvSpPr>
-        <p:spPr>
-          <a:xfrm>
-            <a:off x="1755648" y="4663440"/>
-            <a:ext cx="4919472" cy="182880"/>
-          </a:xfrm>
-          <a:prstGeom prst="rect">
-            <a:avLst/>
-          </a:prstGeom>
-          <a:noFill/>
-          <a:ln/>
-        </p:spPr>
-        <p:txBody>
-          <a:bodyPr wrap="square" rtlCol="0" anchor="ctr"/>
-          <a:lstStyle/>
-          <a:p>
-            <a:pPr indent="0" marL="0">
-              <a:buNone/>
-            </a:pPr>
-            <a:r>
-              <a:rPr lang="en-US" sz="950" dirty="0">
-                <a:solidFill>
-                  <a:srgbClr val="333333"/>
-                </a:solidFill>
-                <a:latin typeface="Calibri" pitchFamily="34" charset="0"/>
-                <a:ea typeface="Calibri" pitchFamily="34" charset="-122"/>
-                <a:cs typeface="Calibri" pitchFamily="34" charset="-120"/>
-              </a:rPr>
-              <a:t>調整中（10月入学前にアプローチ）</a:t>
-            </a:r>
-            <a:endParaRPr lang="en-US" sz="950" dirty="0"/>
-          </a:p>
-        </p:txBody>
-      </p:sp>
-      <p:sp>
-        <p:nvSpPr>
-          <p:cNvPr id="85" name="Text 83"/>
-          <p:cNvSpPr/>
-          <p:nvPr/>
-        </p:nvSpPr>
-        <p:spPr>
-          <a:xfrm>
-            <a:off x="6748272" y="4663440"/>
-            <a:ext cx="640080" cy="182880"/>
-          </a:xfrm>
-          <a:prstGeom prst="rect">
-            <a:avLst/>
-          </a:prstGeom>
-          <a:noFill/>
-          <a:ln/>
-        </p:spPr>
-        <p:txBody>
-          <a:bodyPr wrap="square" rtlCol="0" anchor="ctr"/>
-          <a:lstStyle/>
-          <a:p>
-            <a:pPr algn="ctr" indent="0" marL="0">
-              <a:buNone/>
-            </a:pPr>
-            <a:r>
-              <a:rPr lang="en-US" sz="900" b="1" dirty="0">
-                <a:solidFill>
-                  <a:srgbClr val="333333"/>
-                </a:solidFill>
-                <a:latin typeface="Calibri" pitchFamily="34" charset="0"/>
-                <a:ea typeface="Calibri" pitchFamily="34" charset="-122"/>
-                <a:cs typeface="Calibri" pitchFamily="34" charset="-120"/>
-              </a:rPr>
-              <a:t>〜7校</a:t>
-            </a:r>
-            <a:endParaRPr lang="en-US" sz="900" dirty="0"/>
-          </a:p>
-        </p:txBody>
-      </p:sp>
-      <p:sp>
-        <p:nvSpPr>
-          <p:cNvPr id="86" name="Shape 84"/>
-          <p:cNvSpPr/>
-          <p:nvPr/>
-        </p:nvSpPr>
-        <p:spPr>
-          <a:xfrm>
-            <a:off x="7443216" y="4663440"/>
-            <a:ext cx="1298448" cy="182880"/>
-          </a:xfrm>
-          <a:prstGeom prst="rect">
-            <a:avLst/>
-          </a:prstGeom>
-          <a:solidFill>
-            <a:srgbClr val="999999"/>
-          </a:solidFill>
-          <a:ln/>
-        </p:spPr>
-      </p:sp>
-      <p:sp>
-        <p:nvSpPr>
-          <p:cNvPr id="87" name="Text 85"/>
-          <p:cNvSpPr/>
-          <p:nvPr/>
-        </p:nvSpPr>
-        <p:spPr>
-          <a:xfrm>
-            <a:off x="7443216" y="4663440"/>
-            <a:ext cx="1298448" cy="182880"/>
-          </a:xfrm>
-          <a:prstGeom prst="rect">
-            <a:avLst/>
-          </a:prstGeom>
-          <a:noFill/>
-          <a:ln/>
-        </p:spPr>
-        <p:txBody>
-          <a:bodyPr wrap="square" rtlCol="0" anchor="ctr"/>
-          <a:lstStyle/>
-          <a:p>
-            <a:pPr algn="ctr" indent="0" marL="0">
-              <a:buNone/>
-            </a:pPr>
-            <a:r>
-              <a:rPr lang="en-US" sz="850" b="1" dirty="0">
-                <a:solidFill>
-                  <a:srgbClr val="FFFFFF"/>
-                </a:solidFill>
-                <a:latin typeface="Calibri" pitchFamily="34" charset="0"/>
-                <a:ea typeface="Calibri" pitchFamily="34" charset="-122"/>
-                <a:cs typeface="Calibri" pitchFamily="34" charset="-120"/>
-              </a:rPr>
-              <a:t>未定</a:t>
-            </a:r>
-            <a:endParaRPr lang="en-US" sz="850" dirty="0"/>
-          </a:p>
-        </p:txBody>
-      </p:sp>
-      <p:sp>
-        <p:nvSpPr>
-          <p:cNvPr id="88" name="Shape 86"/>
-          <p:cNvSpPr/>
-          <p:nvPr/>
-        </p:nvSpPr>
-        <p:spPr>
-          <a:xfrm>
-            <a:off x="365760" y="4864608"/>
-            <a:ext cx="8412480" cy="201168"/>
-          </a:xfrm>
-          <a:prstGeom prst="rect">
-            <a:avLst/>
-          </a:prstGeom>
-          <a:solidFill>
-            <a:srgbClr val="DD7E6B"/>
-          </a:solidFill>
-          <a:ln/>
-        </p:spPr>
-      </p:sp>
-      <p:sp>
-        <p:nvSpPr>
-          <p:cNvPr id="89" name="Text 87"/>
-          <p:cNvSpPr/>
-          <p:nvPr/>
-        </p:nvSpPr>
-        <p:spPr>
-          <a:xfrm>
-            <a:off x="365760" y="4864608"/>
-            <a:ext cx="8412480" cy="201168"/>
-          </a:xfrm>
-          <a:prstGeom prst="rect">
-            <a:avLst/>
-          </a:prstGeom>
-          <a:noFill/>
-          <a:ln/>
-        </p:spPr>
-        <p:txBody>
-          <a:bodyPr wrap="square" rtlCol="0" anchor="ctr"/>
-          <a:lstStyle/>
-          <a:p>
-            <a:pPr algn="ctr" indent="0" marL="0">
-              <a:buNone/>
-            </a:pPr>
-            <a:r>
-              <a:rPr lang="en-US" sz="1050" b="1" dirty="0">
-                <a:solidFill>
-                  <a:srgbClr val="FFFFFF"/>
-                </a:solidFill>
-                <a:latin typeface="Calibri" pitchFamily="34" charset="0"/>
-                <a:ea typeface="Calibri" pitchFamily="34" charset="-122"/>
-                <a:cs typeface="Calibri" pitchFamily="34" charset="-120"/>
-              </a:rPr>
-              <a:t>7月末チェック：対象36大学リスト完成・訪問日程仮決め完了・提案資料初稿完成</a:t>
+              <a:t>8月末チェック：全36校への訪問完了・提案資料持参完了・生協提携商談5校以上着手</a:t>
             </a:r>
             <a:endParaRPr lang="en-US" sz="1050" dirty="0"/>
           </a:p>

--- a/事業計画書_営業戦略プラン_v2.pptx
+++ b/事業計画書_営業戦略プラン_v2.pptx
@@ -4407,7 +4407,7 @@
                 <a:ea typeface="Calibri" pitchFamily="34" charset="-122"/>
                 <a:cs typeface="Calibri" pitchFamily="34" charset="-120"/>
               </a:rPr>
-              <a:t>ターゲットリスト50〜80校</a:t>
+              <a:t>ターゲットリスト36〜41校</a:t>
             </a:r>
             <a:endParaRPr lang="en-US" sz="1050" dirty="0"/>
           </a:p>
@@ -4528,7 +4528,7 @@
                 <a:ea typeface="Calibri" pitchFamily="34" charset="-122"/>
                 <a:cs typeface="Calibri" pitchFamily="34" charset="-120"/>
               </a:rPr>
-              <a:t>アポ80〜100件</a:t>
+              <a:t>アポ70〜90件</a:t>
             </a:r>
             <a:endParaRPr lang="en-US" sz="1100" dirty="0"/>
           </a:p>
@@ -6550,7 +6550,7 @@
                 <a:ea typeface="Calibri" pitchFamily="34" charset="-122"/>
                 <a:cs typeface="Calibri" pitchFamily="34" charset="-120"/>
               </a:rPr>
-              <a:t>40〜50回</a:t>
+              <a:t>35〜45回</a:t>
             </a:r>
             <a:endParaRPr lang="en-US" sz="1300" dirty="0"/>
           </a:p>
@@ -6648,7 +6648,7 @@
                 <a:ea typeface="Calibri" pitchFamily="34" charset="-122"/>
                 <a:cs typeface="Calibri" pitchFamily="34" charset="-120"/>
               </a:rPr>
-              <a:t>80〜100件</a:t>
+              <a:t>70〜90件</a:t>
             </a:r>
             <a:endParaRPr lang="en-US" sz="1300" dirty="0"/>
           </a:p>
@@ -6746,7 +6746,7 @@
                 <a:ea typeface="Calibri" pitchFamily="34" charset="-122"/>
                 <a:cs typeface="Calibri" pitchFamily="34" charset="-120"/>
               </a:rPr>
-              <a:t>1,500〜2,000件</a:t>
+              <a:t>150〜200件</a:t>
             </a:r>
             <a:endParaRPr lang="en-US" sz="1300" dirty="0"/>
           </a:p>
@@ -6928,7 +6928,7 @@
                 <a:ea typeface="Calibri" pitchFamily="34" charset="-122"/>
                 <a:cs typeface="Calibri" pitchFamily="34" charset="-120"/>
               </a:rPr>
-              <a:t>30〜40件/週</a:t>
+              <a:t>5〜10件/週</a:t>
             </a:r>
             <a:endParaRPr lang="en-US" sz="1100" dirty="0"/>
           </a:p>
@@ -17160,24 +17160,24 @@
         </p:nvSpPr>
         <p:spPr>
           <a:xfrm>
-            <a:off x="3474720" y="1719072"/>
-            <a:ext cx="4572000" cy="310896"/>
-          </a:xfrm>
-          <a:prstGeom prst="rect">
-            <a:avLst/>
-          </a:prstGeom>
-          <a:noFill/>
-          <a:ln/>
-        </p:spPr>
-        <p:txBody>
-          <a:bodyPr wrap="square" rtlCol="0" anchor="ctr"/>
+            <a:off x="3291840" y="1719072"/>
+            <a:ext cx="4846320" cy="310896"/>
+          </a:xfrm>
+          <a:prstGeom prst="rect">
+            <a:avLst/>
+          </a:prstGeom>
+          <a:noFill/>
+          <a:ln/>
+        </p:spPr>
+        <p:txBody>
+          <a:bodyPr wrap="square" lIns="0" tIns="0" rIns="0" bIns="0" rtlCol="0" anchor="ctr"/>
           <a:lstStyle/>
           <a:p>
             <a:pPr indent="0" marL="0">
               <a:buNone/>
             </a:pPr>
             <a:r>
-              <a:rPr lang="en-US" sz="1000" dirty="0">
+              <a:rPr lang="en-US" sz="850" dirty="0">
                 <a:solidFill>
                   <a:srgbClr val="FFFFFF"/>
                 </a:solidFill>
@@ -17187,7 +17187,7 @@
               </a:rPr>
               <a:t>3点セット × 月2,083円 × 12ヶ月 ≒ 1,000万円</a:t>
             </a:r>
-            <a:endParaRPr lang="en-US" sz="1000" dirty="0"/>
+            <a:endParaRPr lang="en-US" sz="850" dirty="0"/>
           </a:p>
         </p:txBody>
       </p:sp>
@@ -17297,24 +17297,24 @@
         </p:nvSpPr>
         <p:spPr>
           <a:xfrm>
-            <a:off x="3931920" y="2377440"/>
-            <a:ext cx="3657600" cy="310896"/>
-          </a:xfrm>
-          <a:prstGeom prst="rect">
-            <a:avLst/>
-          </a:prstGeom>
-          <a:noFill/>
-          <a:ln/>
-        </p:spPr>
-        <p:txBody>
-          <a:bodyPr wrap="square" rtlCol="0" anchor="ctr"/>
+            <a:off x="3749040" y="2377440"/>
+            <a:ext cx="3931920" cy="310896"/>
+          </a:xfrm>
+          <a:prstGeom prst="rect">
+            <a:avLst/>
+          </a:prstGeom>
+          <a:noFill/>
+          <a:ln/>
+        </p:spPr>
+        <p:txBody>
+          <a:bodyPr wrap="square" lIns="0" tIns="0" rIns="0" bIns="0" rtlCol="0" anchor="ctr"/>
           <a:lstStyle/>
           <a:p>
             <a:pPr indent="0" marL="0">
               <a:buNone/>
             </a:pPr>
             <a:r>
-              <a:rPr lang="en-US" sz="1000" dirty="0">
+              <a:rPr lang="en-US" sz="850" dirty="0">
                 <a:solidFill>
                   <a:srgbClr val="FFFFFF"/>
                 </a:solidFill>
@@ -17324,7 +17324,7 @@
               </a:rPr>
               <a:t>1校あたり平均30件獲得（新入生300人×自宅外率30%×獲得率10%）</a:t>
             </a:r>
-            <a:endParaRPr lang="en-US" sz="1000" dirty="0"/>
+            <a:endParaRPr lang="en-US" sz="850" dirty="0"/>
           </a:p>
         </p:txBody>
       </p:sp>
@@ -17420,7 +17420,7 @@
                 <a:ea typeface="Calibri" pitchFamily="34" charset="-122"/>
                 <a:cs typeface="Calibri" pitchFamily="34" charset="-120"/>
               </a:rPr>
-              <a:t>40〜50回</a:t>
+              <a:t>35〜45回</a:t>
             </a:r>
             <a:endParaRPr lang="en-US" sz="1400" dirty="0"/>
           </a:p>
@@ -17434,24 +17434,24 @@
         </p:nvSpPr>
         <p:spPr>
           <a:xfrm>
-            <a:off x="4389120" y="3035808"/>
-            <a:ext cx="2743200" cy="310896"/>
-          </a:xfrm>
-          <a:prstGeom prst="rect">
-            <a:avLst/>
-          </a:prstGeom>
-          <a:noFill/>
-          <a:ln/>
-        </p:spPr>
-        <p:txBody>
-          <a:bodyPr wrap="square" rtlCol="0" anchor="ctr"/>
+            <a:off x="4206240" y="3035808"/>
+            <a:ext cx="3017520" cy="310896"/>
+          </a:xfrm>
+          <a:prstGeom prst="rect">
+            <a:avLst/>
+          </a:prstGeom>
+          <a:noFill/>
+          <a:ln/>
+        </p:spPr>
+        <p:txBody>
+          <a:bodyPr wrap="square" lIns="0" tIns="0" rIns="0" bIns="0" rtlCol="0" anchor="ctr"/>
           <a:lstStyle/>
           <a:p>
             <a:pPr indent="0" marL="0">
               <a:buNone/>
             </a:pPr>
             <a:r>
-              <a:rPr lang="en-US" sz="1000" dirty="0">
+              <a:rPr lang="en-US" sz="850" dirty="0">
                 <a:solidFill>
                   <a:srgbClr val="FFFFFF"/>
                 </a:solidFill>
@@ -17461,7 +17461,7 @@
               </a:rPr>
               <a:t>提携締結率30〜40% → 13校到達</a:t>
             </a:r>
-            <a:endParaRPr lang="en-US" sz="1000" dirty="0"/>
+            <a:endParaRPr lang="en-US" sz="850" dirty="0"/>
           </a:p>
         </p:txBody>
       </p:sp>
@@ -17557,7 +17557,7 @@
                 <a:ea typeface="Calibri" pitchFamily="34" charset="-122"/>
                 <a:cs typeface="Calibri" pitchFamily="34" charset="-120"/>
               </a:rPr>
-              <a:t>80〜100件</a:t>
+              <a:t>70〜90件</a:t>
             </a:r>
             <a:endParaRPr lang="en-US" sz="1400" dirty="0"/>
           </a:p>
@@ -17571,24 +17571,24 @@
         </p:nvSpPr>
         <p:spPr>
           <a:xfrm>
-            <a:off x="4846320" y="3694176"/>
-            <a:ext cx="1828800" cy="310896"/>
-          </a:xfrm>
-          <a:prstGeom prst="rect">
-            <a:avLst/>
-          </a:prstGeom>
-          <a:noFill/>
-          <a:ln/>
-        </p:spPr>
-        <p:txBody>
-          <a:bodyPr wrap="square" rtlCol="0" anchor="ctr"/>
+            <a:off x="4663440" y="3694176"/>
+            <a:ext cx="2103120" cy="310896"/>
+          </a:xfrm>
+          <a:prstGeom prst="rect">
+            <a:avLst/>
+          </a:prstGeom>
+          <a:noFill/>
+          <a:ln/>
+        </p:spPr>
+        <p:txBody>
+          <a:bodyPr wrap="square" lIns="0" tIns="0" rIns="0" bIns="0" rtlCol="0" anchor="ctr"/>
           <a:lstStyle/>
           <a:p>
             <a:pPr indent="0" marL="0">
               <a:buNone/>
             </a:pPr>
             <a:r>
-              <a:rPr lang="en-US" sz="1000" dirty="0">
+              <a:rPr lang="en-US" sz="850" dirty="0">
                 <a:solidFill>
                   <a:srgbClr val="FFFFFF"/>
                 </a:solidFill>
@@ -17598,7 +17598,7 @@
               </a:rPr>
               <a:t>商談化率50%</a:t>
             </a:r>
-            <a:endParaRPr lang="en-US" sz="1000" dirty="0"/>
+            <a:endParaRPr lang="en-US" sz="850" dirty="0"/>
           </a:p>
         </p:txBody>
       </p:sp>
@@ -17694,7 +17694,7 @@
                 <a:ea typeface="Calibri" pitchFamily="34" charset="-122"/>
                 <a:cs typeface="Calibri" pitchFamily="34" charset="-120"/>
               </a:rPr>
-              <a:t>1,500〜2,000件</a:t>
+              <a:t>150〜200件</a:t>
             </a:r>
             <a:endParaRPr lang="en-US" sz="1400" dirty="0"/>
           </a:p>
@@ -17708,24 +17708,24 @@
         </p:nvSpPr>
         <p:spPr>
           <a:xfrm>
-            <a:off x="5212080" y="4352544"/>
-            <a:ext cx="1097280" cy="310896"/>
-          </a:xfrm>
-          <a:prstGeom prst="rect">
-            <a:avLst/>
-          </a:prstGeom>
-          <a:noFill/>
-          <a:ln/>
-        </p:spPr>
-        <p:txBody>
-          <a:bodyPr wrap="square" rtlCol="0" anchor="ctr"/>
+            <a:off x="5029200" y="4352544"/>
+            <a:ext cx="1371600" cy="310896"/>
+          </a:xfrm>
+          <a:prstGeom prst="rect">
+            <a:avLst/>
+          </a:prstGeom>
+          <a:noFill/>
+          <a:ln/>
+        </p:spPr>
+        <p:txBody>
+          <a:bodyPr wrap="square" lIns="0" tIns="0" rIns="0" bIns="0" rtlCol="0" anchor="ctr"/>
           <a:lstStyle/>
           <a:p>
             <a:pPr indent="0" marL="0">
               <a:buNone/>
             </a:pPr>
             <a:r>
-              <a:rPr lang="en-US" sz="1000" dirty="0">
+              <a:rPr lang="en-US" sz="850" dirty="0">
                 <a:solidFill>
                   <a:srgbClr val="FFFFFF"/>
                 </a:solidFill>
@@ -17733,9 +17733,9 @@
                 <a:ea typeface="Calibri" pitchFamily="34" charset="-122"/>
                 <a:cs typeface="Calibri" pitchFamily="34" charset="-120"/>
               </a:rPr>
-              <a:t>アポ化率5%</a:t>
-            </a:r>
-            <a:endParaRPr lang="en-US" sz="1000" dirty="0"/>
+              <a:t>アポ化率40〜50%</a:t>
+            </a:r>
+            <a:endParaRPr lang="en-US" sz="850" dirty="0"/>
           </a:p>
         </p:txBody>
       </p:sp>
